--- a/downloads/research/kyle-hobson-research-deck.pptx
+++ b/downloads/research/kyle-hobson-research-deck.pptx
@@ -2,23 +2,23 @@
 <file path=ppt/presentation.xml><?xml version="1.0" encoding="utf-8"?>
 <p:presentation xmlns:p="http://schemas.openxmlformats.org/presentationml/2006/main">
   <p:sldMasterIdLst>
-    <p:sldMasterId xmlns:r="http://schemas.openxmlformats.org/officeDocument/2006/relationships" id="2147483648" r:id="R873bba30805044ac"/>
+    <p:sldMasterId xmlns:r="http://schemas.openxmlformats.org/officeDocument/2006/relationships" id="2147483648" r:id="R814600e6a16040e6"/>
   </p:sldMasterIdLst>
   <p:notesMasterIdLst>
-    <p:notesMasterId xmlns:r="http://schemas.openxmlformats.org/officeDocument/2006/relationships" r:id="Ra1ab58c30fb94763"/>
+    <p:notesMasterId xmlns:r="http://schemas.openxmlformats.org/officeDocument/2006/relationships" r:id="R7c74c336a5de479c"/>
   </p:notesMasterIdLst>
   <p:sldIdLst>
-    <p:sldId xmlns:r="http://schemas.openxmlformats.org/officeDocument/2006/relationships" id="256" r:id="R2bfd92a83e484f64"/>
-    <p:sldId xmlns:r="http://schemas.openxmlformats.org/officeDocument/2006/relationships" id="257" r:id="R093d7f472ad14ab0"/>
-    <p:sldId xmlns:r="http://schemas.openxmlformats.org/officeDocument/2006/relationships" id="258" r:id="R501356e42e5549a3"/>
-    <p:sldId xmlns:r="http://schemas.openxmlformats.org/officeDocument/2006/relationships" id="259" r:id="R32933ff0a9d043c8"/>
-    <p:sldId xmlns:r="http://schemas.openxmlformats.org/officeDocument/2006/relationships" id="260" r:id="R93a5e4618e9445f1"/>
-    <p:sldId xmlns:r="http://schemas.openxmlformats.org/officeDocument/2006/relationships" id="261" r:id="Rb5f047c74be543df"/>
-    <p:sldId xmlns:r="http://schemas.openxmlformats.org/officeDocument/2006/relationships" id="262" r:id="Rfc42f46c525a454c"/>
-    <p:sldId xmlns:r="http://schemas.openxmlformats.org/officeDocument/2006/relationships" id="263" r:id="R05bdecd5e2e04c99"/>
-    <p:sldId xmlns:r="http://schemas.openxmlformats.org/officeDocument/2006/relationships" id="264" r:id="Rb4a3c9a739b94ced"/>
-    <p:sldId xmlns:r="http://schemas.openxmlformats.org/officeDocument/2006/relationships" id="265" r:id="Rb391f5140cf54959"/>
-    <p:sldId xmlns:r="http://schemas.openxmlformats.org/officeDocument/2006/relationships" id="266" r:id="Reac3ce704501489d"/>
+    <p:sldId xmlns:r="http://schemas.openxmlformats.org/officeDocument/2006/relationships" id="256" r:id="R65b3d143d81441fa"/>
+    <p:sldId xmlns:r="http://schemas.openxmlformats.org/officeDocument/2006/relationships" id="257" r:id="R67c202efe18b49ae"/>
+    <p:sldId xmlns:r="http://schemas.openxmlformats.org/officeDocument/2006/relationships" id="258" r:id="R7f224f11675541c8"/>
+    <p:sldId xmlns:r="http://schemas.openxmlformats.org/officeDocument/2006/relationships" id="259" r:id="R7eb828905c164e4d"/>
+    <p:sldId xmlns:r="http://schemas.openxmlformats.org/officeDocument/2006/relationships" id="260" r:id="R785eeb44622f44b3"/>
+    <p:sldId xmlns:r="http://schemas.openxmlformats.org/officeDocument/2006/relationships" id="261" r:id="R4ec4367a88074289"/>
+    <p:sldId xmlns:r="http://schemas.openxmlformats.org/officeDocument/2006/relationships" id="262" r:id="Rc6c0ce053f424601"/>
+    <p:sldId xmlns:r="http://schemas.openxmlformats.org/officeDocument/2006/relationships" id="263" r:id="Rc3b68063335d4cf3"/>
+    <p:sldId xmlns:r="http://schemas.openxmlformats.org/officeDocument/2006/relationships" id="264" r:id="R173213a3be024710"/>
+    <p:sldId xmlns:r="http://schemas.openxmlformats.org/officeDocument/2006/relationships" id="265" r:id="Rcb95c7d5e12b4c56"/>
+    <p:sldId xmlns:r="http://schemas.openxmlformats.org/officeDocument/2006/relationships" id="266" r:id="R5496ee620d054973"/>
   </p:sldIdLst>
   <p:sldSz cx="12192000" cy="6858000"/>
   <p:notesSz cx="6858000" cy="9144000"/>
@@ -452,7 +452,7 @@
           <a:lstStyle xmlns:a="http://schemas.openxmlformats.org/drawingml/2006/main"/>
           <a:p xmlns:a="http://schemas.openxmlformats.org/drawingml/2006/main">
             <a:r>
-              <a:t>Kyle Hobson, UX Researcher. Selected work at Oak AI and Oak + Qasim. The cover uses a generated decorative paper-path image, not project evidence. The following cases show research methods, evidence, product decisions and the limits on each conclusion.</a:t>
+              <a:t>Kyle Hobson, UX Researcher. Selected work at Oak AI and Oak + Qasim. Cover: a reformatted view of reported barriers from the original March 2025 audience findings report, page 14. These are self-reported percentages from a voluntary audience sample; per-item response bases were not recovered. The cases show methods, evidence, product decisions and the limits on each conclusion.</a:t>
             </a:r>
           </a:p>
         </p:txBody>
@@ -1220,7 +1220,7 @@
   </p:cSld>
   <p:clrMap bg1="lt1" tx1="dk1" bg2="lt2" tx2="dk2" accent1="accent1" accent2="accent2" accent3="accent3" accent4="accent4" accent5="accent5" accent6="accent6" hlink="hlink" folHlink="folHlink"/>
   <p:sldLayoutIdLst>
-    <p:sldLayoutId xmlns:r="http://schemas.openxmlformats.org/officeDocument/2006/relationships" id="2147483649" r:id="Rc43647755caa4f2a"/>
+    <p:sldLayoutId xmlns:r="http://schemas.openxmlformats.org/officeDocument/2006/relationships" id="2147483649" r:id="R80863ccd52aa4d3f"/>
   </p:sldLayoutIdLst>
   <p:txStyles>
     <p:titleStyle>
@@ -1948,25 +1948,313 @@
       <p:grpSpPr>
         <a:xfrm xmlns:a="http://schemas.openxmlformats.org/drawingml/2006/main"/>
       </p:grpSpPr>
+      <p:sp>
+        <p:nvSpPr>
+          <p:cNvPr id="8" name="section-label">
+            <a:extLst xmlns:a="http://schemas.openxmlformats.org/drawingml/2006/main">
+              <a:ext uri="{FF2B5EF4-FFF2-40B4-BE49-F238E27FC236}">
+                <a16:creationId xmlns:a16="http://schemas.microsoft.com/office/drawing/2014/main" id="{A057CB0B-87B8-417C-8E82-517E94C0DFC5}"/>
+              </a:ext>
+            </a:extLst>
+          </p:cNvPr>
+          <p:cNvSpPr>
+            <a:spLocks xmlns:a="http://schemas.openxmlformats.org/drawingml/2006/main" noGrp="1"/>
+          </p:cNvSpPr>
+          <p:nvPr/>
+        </p:nvSpPr>
+        <p:spPr>
+          <a:xfrm xmlns:a="http://schemas.openxmlformats.org/drawingml/2006/main">
+            <a:off x="609600" y="514350"/>
+            <a:ext cx="6858000" cy="266700"/>
+          </a:xfrm>
+          <a:prstGeom xmlns:a="http://schemas.openxmlformats.org/drawingml/2006/main" prst="rect">
+            <a:avLst/>
+          </a:prstGeom>
+          <a:noFill xmlns:a="http://schemas.openxmlformats.org/drawingml/2006/main"/>
+          <a:ln xmlns:a="http://schemas.openxmlformats.org/drawingml/2006/main" w="0">
+            <a:noFill/>
+          </a:ln>
+        </p:spPr>
+        <p:txBody>
+          <a:bodyPr xmlns:a="http://schemas.openxmlformats.org/drawingml/2006/main" wrap="square" lIns="0" tIns="0" rIns="0" bIns="0" anchor="t">
+            <a:noAutofit/>
+          </a:bodyPr>
+          <a:lstStyle xmlns:a="http://schemas.openxmlformats.org/drawingml/2006/main"/>
+          <a:p xmlns:a="http://schemas.openxmlformats.org/drawingml/2006/main">
+            <a:pPr>
+              <a:lnSpc>
+                <a:spcPct val="110000"/>
+              </a:lnSpc>
+              <a:buNone/>
+              <a:defRPr sz="1200" b="1">
+                <a:solidFill>
+                  <a:srgbClr val="244D3C"/>
+                </a:solidFill>
+                <a:latin typeface="Helvetica Neue"/>
+                <a:ea typeface="Helvetica Neue"/>
+                <a:cs typeface="Helvetica Neue"/>
+              </a:defRPr>
+            </a:pPr>
+            <a:r>
+              <a:rPr sz="1200" b="1">
+                <a:solidFill>
+                  <a:srgbClr val="244D3C"/>
+                </a:solidFill>
+                <a:latin typeface="Helvetica Neue"/>
+                <a:ea typeface="Helvetica Neue"/>
+                <a:cs typeface="Helvetica Neue"/>
+              </a:rPr>
+              <a:t>KYLE HOBSON   /   UX RESEARCH</a:t>
+            </a:r>
+          </a:p>
+        </p:txBody>
+      </p:sp>
+      <p:sp>
+        <p:nvSpPr>
+          <p:cNvPr id="2" name="headline">
+            <a:extLst xmlns:a="http://schemas.openxmlformats.org/drawingml/2006/main">
+              <a:ext uri="{FF2B5EF4-FFF2-40B4-BE49-F238E27FC236}">
+                <a16:creationId xmlns:a16="http://schemas.microsoft.com/office/drawing/2014/main" id="{F9F4D5CE-42C1-42C2-8EA4-BB498A9A92F4}"/>
+              </a:ext>
+            </a:extLst>
+          </p:cNvPr>
+          <p:cNvSpPr>
+            <a:spLocks xmlns:a="http://schemas.openxmlformats.org/drawingml/2006/main" noGrp="1"/>
+          </p:cNvSpPr>
+          <p:nvPr/>
+        </p:nvSpPr>
+        <p:spPr>
+          <a:xfrm xmlns:a="http://schemas.openxmlformats.org/drawingml/2006/main">
+            <a:off x="609600" y="1552575"/>
+            <a:ext cx="5381625" cy="2247900"/>
+          </a:xfrm>
+          <a:prstGeom xmlns:a="http://schemas.openxmlformats.org/drawingml/2006/main" prst="rect">
+            <a:avLst/>
+          </a:prstGeom>
+          <a:noFill xmlns:a="http://schemas.openxmlformats.org/drawingml/2006/main"/>
+          <a:ln xmlns:a="http://schemas.openxmlformats.org/drawingml/2006/main" w="0">
+            <a:noFill/>
+          </a:ln>
+        </p:spPr>
+        <p:txBody>
+          <a:bodyPr xmlns:a="http://schemas.openxmlformats.org/drawingml/2006/main" wrap="square" lIns="0" tIns="0" rIns="0" bIns="0" anchor="t">
+            <a:noAutofit/>
+          </a:bodyPr>
+          <a:lstStyle xmlns:a="http://schemas.openxmlformats.org/drawingml/2006/main"/>
+          <a:p xmlns:a="http://schemas.openxmlformats.org/drawingml/2006/main">
+            <a:pPr>
+              <a:lnSpc>
+                <a:spcPct val="110000"/>
+              </a:lnSpc>
+              <a:buNone/>
+              <a:defRPr sz="4350" b="1">
+                <a:solidFill>
+                  <a:srgbClr val="192B25"/>
+                </a:solidFill>
+                <a:latin typeface="Helvetica Neue"/>
+                <a:ea typeface="Helvetica Neue"/>
+                <a:cs typeface="Helvetica Neue"/>
+              </a:defRPr>
+            </a:pPr>
+            <a:r>
+              <a:rPr sz="4350" b="1">
+                <a:solidFill>
+                  <a:srgbClr val="192B25"/>
+                </a:solidFill>
+                <a:latin typeface="Helvetica Neue"/>
+                <a:ea typeface="Helvetica Neue"/>
+                <a:cs typeface="Helvetica Neue"/>
+              </a:rPr>
+              <a:t>Research for the</a:t>
+            </a:r>
+          </a:p>
+          <a:p xmlns:a="http://schemas.openxmlformats.org/drawingml/2006/main">
+            <a:pPr>
+              <a:lnSpc>
+                <a:spcPct val="110000"/>
+              </a:lnSpc>
+              <a:buNone/>
+              <a:defRPr sz="4350" b="1">
+                <a:solidFill>
+                  <a:srgbClr val="192B25"/>
+                </a:solidFill>
+                <a:latin typeface="Helvetica Neue"/>
+                <a:ea typeface="Helvetica Neue"/>
+                <a:cs typeface="Helvetica Neue"/>
+              </a:defRPr>
+            </a:pPr>
+            <a:r>
+              <a:rPr sz="4350" b="1">
+                <a:solidFill>
+                  <a:srgbClr val="192B25"/>
+                </a:solidFill>
+                <a:latin typeface="Helvetica Neue"/>
+                <a:ea typeface="Helvetica Neue"/>
+                <a:cs typeface="Helvetica Neue"/>
+              </a:rPr>
+              <a:t>next product</a:t>
+            </a:r>
+          </a:p>
+          <a:p xmlns:a="http://schemas.openxmlformats.org/drawingml/2006/main">
+            <a:pPr>
+              <a:lnSpc>
+                <a:spcPct val="110000"/>
+              </a:lnSpc>
+              <a:buNone/>
+              <a:defRPr sz="4350" b="1">
+                <a:solidFill>
+                  <a:srgbClr val="192B25"/>
+                </a:solidFill>
+                <a:latin typeface="Helvetica Neue"/>
+                <a:ea typeface="Helvetica Neue"/>
+                <a:cs typeface="Helvetica Neue"/>
+              </a:defRPr>
+            </a:pPr>
+            <a:r>
+              <a:rPr sz="4350" b="1">
+                <a:solidFill>
+                  <a:srgbClr val="192B25"/>
+                </a:solidFill>
+                <a:latin typeface="Helvetica Neue"/>
+                <a:ea typeface="Helvetica Neue"/>
+                <a:cs typeface="Helvetica Neue"/>
+              </a:rPr>
+              <a:t>decision</a:t>
+            </a:r>
+          </a:p>
+        </p:txBody>
+      </p:sp>
+      <p:sp>
+        <p:nvSpPr>
+          <p:cNvPr id="3" name="cover-intro">
+            <a:extLst xmlns:a="http://schemas.openxmlformats.org/drawingml/2006/main">
+              <a:ext uri="{FF2B5EF4-FFF2-40B4-BE49-F238E27FC236}">
+                <a16:creationId xmlns:a16="http://schemas.microsoft.com/office/drawing/2014/main" id="{3D32C61F-3829-40D3-B8D6-26A94EFE8D92}"/>
+              </a:ext>
+            </a:extLst>
+          </p:cNvPr>
+          <p:cNvSpPr>
+            <a:spLocks xmlns:a="http://schemas.openxmlformats.org/drawingml/2006/main" noGrp="1"/>
+          </p:cNvSpPr>
+          <p:nvPr/>
+        </p:nvSpPr>
+        <p:spPr>
+          <a:xfrm xmlns:a="http://schemas.openxmlformats.org/drawingml/2006/main">
+            <a:off x="647700" y="4229100"/>
+            <a:ext cx="5219700" cy="1200150"/>
+          </a:xfrm>
+          <a:prstGeom xmlns:a="http://schemas.openxmlformats.org/drawingml/2006/main" prst="rect">
+            <a:avLst/>
+          </a:prstGeom>
+          <a:noFill xmlns:a="http://schemas.openxmlformats.org/drawingml/2006/main"/>
+          <a:ln xmlns:a="http://schemas.openxmlformats.org/drawingml/2006/main" w="0">
+            <a:noFill/>
+          </a:ln>
+        </p:spPr>
+        <p:txBody>
+          <a:bodyPr xmlns:a="http://schemas.openxmlformats.org/drawingml/2006/main" wrap="square" lIns="0" tIns="0" rIns="0" bIns="0" anchor="t">
+            <a:noAutofit/>
+          </a:bodyPr>
+          <a:lstStyle xmlns:a="http://schemas.openxmlformats.org/drawingml/2006/main"/>
+          <a:p xmlns:a="http://schemas.openxmlformats.org/drawingml/2006/main">
+            <a:pPr>
+              <a:lnSpc>
+                <a:spcPct val="110000"/>
+              </a:lnSpc>
+              <a:buNone/>
+              <a:defRPr sz="2025" b="0">
+                <a:solidFill>
+                  <a:srgbClr val="192B25"/>
+                </a:solidFill>
+                <a:latin typeface="Helvetica Neue"/>
+                <a:ea typeface="Helvetica Neue"/>
+                <a:cs typeface="Helvetica Neue"/>
+              </a:defRPr>
+            </a:pPr>
+            <a:r>
+              <a:rPr sz="2025" b="0">
+                <a:solidFill>
+                  <a:srgbClr val="192B25"/>
+                </a:solidFill>
+                <a:latin typeface="Helvetica Neue"/>
+                <a:ea typeface="Helvetica Neue"/>
+                <a:cs typeface="Helvetica Neue"/>
+              </a:rPr>
+              <a:t>I study where people get stuck</a:t>
+            </a:r>
+          </a:p>
+          <a:p xmlns:a="http://schemas.openxmlformats.org/drawingml/2006/main">
+            <a:pPr>
+              <a:lnSpc>
+                <a:spcPct val="110000"/>
+              </a:lnSpc>
+              <a:buNone/>
+              <a:defRPr sz="2025" b="0">
+                <a:solidFill>
+                  <a:srgbClr val="192B25"/>
+                </a:solidFill>
+                <a:latin typeface="Helvetica Neue"/>
+                <a:ea typeface="Helvetica Neue"/>
+                <a:cs typeface="Helvetica Neue"/>
+              </a:defRPr>
+            </a:pPr>
+            <a:r>
+              <a:rPr sz="2025" b="0">
+                <a:solidFill>
+                  <a:srgbClr val="192B25"/>
+                </a:solidFill>
+                <a:latin typeface="Helvetica Neue"/>
+                <a:ea typeface="Helvetica Neue"/>
+                <a:cs typeface="Helvetica Neue"/>
+              </a:rPr>
+              <a:t>so teams can make better</a:t>
+            </a:r>
+          </a:p>
+          <a:p xmlns:a="http://schemas.openxmlformats.org/drawingml/2006/main">
+            <a:pPr>
+              <a:lnSpc>
+                <a:spcPct val="110000"/>
+              </a:lnSpc>
+              <a:buNone/>
+              <a:defRPr sz="2025" b="0">
+                <a:solidFill>
+                  <a:srgbClr val="192B25"/>
+                </a:solidFill>
+                <a:latin typeface="Helvetica Neue"/>
+                <a:ea typeface="Helvetica Neue"/>
+                <a:cs typeface="Helvetica Neue"/>
+              </a:defRPr>
+            </a:pPr>
+            <a:r>
+              <a:rPr sz="2025" b="0">
+                <a:solidFill>
+                  <a:srgbClr val="192B25"/>
+                </a:solidFill>
+                <a:latin typeface="Helvetica Neue"/>
+                <a:ea typeface="Helvetica Neue"/>
+                <a:cs typeface="Helvetica Neue"/>
+              </a:rPr>
+              <a:t>product decisions.</a:t>
+            </a:r>
+          </a:p>
+        </p:txBody>
+      </p:sp>
       <p:pic>
         <p:nvPicPr>
-          <p:cNvPr id="7" name=""/>
+          <p:cNvPr id="11" name=""/>
           <p:cNvPicPr>
             <a:picLocks xmlns:a="http://schemas.openxmlformats.org/drawingml/2006/main" noChangeAspect="1"/>
           </p:cNvPicPr>
           <p:nvPr/>
         </p:nvPicPr>
         <p:blipFill>
-          <a:blip xmlns:r="http://schemas.openxmlformats.org/officeDocument/2006/relationships" xmlns:a="http://schemas.openxmlformats.org/drawingml/2006/main" r:embed="R8d96e7d5694c459f"/>
-          <a:srcRect xmlns:a="http://schemas.openxmlformats.org/drawingml/2006/main" l="0" t="7813" r="0" b="7813"/>
-          <a:stretch xmlns:a="http://schemas.openxmlformats.org/drawingml/2006/main">
-            <a:fillRect l="0" t="0" r="0" b="0"/>
-          </a:stretch>
+          <a:blip xmlns:r="http://schemas.openxmlformats.org/officeDocument/2006/relationships" xmlns:a="http://schemas.openxmlformats.org/drawingml/2006/main" r:embed="R977938502c6f432e"/>
+          <a:stretch xmlns:a="http://schemas.openxmlformats.org/drawingml/2006/main"/>
         </p:blipFill>
         <p:spPr>
           <a:xfrm xmlns:a="http://schemas.openxmlformats.org/drawingml/2006/main">
-            <a:off x="0" y="0"/>
-            <a:ext cx="12192000" cy="6858000"/>
+            <a:off x="6288617" y="1695450"/>
+            <a:ext cx="5291667" cy="3810000"/>
           </a:xfrm>
           <a:prstGeom xmlns:a="http://schemas.openxmlformats.org/drawingml/2006/main" prst="rect">
             <a:avLst/>
@@ -1975,43 +2263,131 @@
       </p:pic>
       <p:sp>
         <p:nvSpPr>
-          <p:cNvPr id="2" name="section-label">
-            <a:extLst xmlns:a="http://schemas.openxmlformats.org/drawingml/2006/main">
-              <a:ext uri="{FF2B5EF4-FFF2-40B4-BE49-F238E27FC236}">
-                <a16:creationId xmlns:a16="http://schemas.microsoft.com/office/drawing/2014/main" id="{C94186D6-F2B9-4069-BB61-1C68C34952A6}"/>
-              </a:ext>
-            </a:extLst>
-          </p:cNvPr>
-          <p:cNvSpPr>
-            <a:spLocks xmlns:a="http://schemas.openxmlformats.org/drawingml/2006/main" noGrp="1"/>
-          </p:cNvSpPr>
-          <p:nvPr/>
-        </p:nvSpPr>
-        <p:spPr>
-          <a:xfrm xmlns:a="http://schemas.openxmlformats.org/drawingml/2006/main">
-            <a:off x="609600" y="514350"/>
-            <a:ext cx="6858000" cy="266700"/>
-          </a:xfrm>
-          <a:prstGeom xmlns:a="http://schemas.openxmlformats.org/drawingml/2006/main" prst="rect">
-            <a:avLst/>
-          </a:prstGeom>
-          <a:noFill xmlns:a="http://schemas.openxmlformats.org/drawingml/2006/main"/>
-          <a:ln xmlns:a="http://schemas.openxmlformats.org/drawingml/2006/main" w="0">
-            <a:noFill/>
-          </a:ln>
-        </p:spPr>
-        <p:txBody>
-          <a:bodyPr xmlns:a="http://schemas.openxmlformats.org/drawingml/2006/main" wrap="square" lIns="0" tIns="0" rIns="0" bIns="0" anchor="t">
-            <a:noAutofit/>
-          </a:bodyPr>
-          <a:lstStyle xmlns:a="http://schemas.openxmlformats.org/drawingml/2006/main"/>
-          <a:p xmlns:a="http://schemas.openxmlformats.org/drawingml/2006/main">
-            <a:pPr>
-              <a:lnSpc>
-                <a:spcPct val="110000"/>
-              </a:lnSpc>
-              <a:buNone/>
-              <a:defRPr sz="1200" b="1">
+          <p:cNvPr id="5" name="cover-source">
+            <a:extLst xmlns:a="http://schemas.openxmlformats.org/drawingml/2006/main">
+              <a:ext uri="{FF2B5EF4-FFF2-40B4-BE49-F238E27FC236}">
+                <a16:creationId xmlns:a16="http://schemas.microsoft.com/office/drawing/2014/main" id="{E636EB7F-0045-452B-A1EE-BE809ABC8500}"/>
+              </a:ext>
+            </a:extLst>
+          </p:cNvPr>
+          <p:cNvSpPr>
+            <a:spLocks xmlns:a="http://schemas.openxmlformats.org/drawingml/2006/main" noGrp="1"/>
+          </p:cNvSpPr>
+          <p:nvPr/>
+        </p:nvSpPr>
+        <p:spPr>
+          <a:xfrm xmlns:a="http://schemas.openxmlformats.org/drawingml/2006/main">
+            <a:off x="6286500" y="5705475"/>
+            <a:ext cx="5295900" cy="571500"/>
+          </a:xfrm>
+          <a:prstGeom xmlns:a="http://schemas.openxmlformats.org/drawingml/2006/main" prst="rect">
+            <a:avLst/>
+          </a:prstGeom>
+          <a:noFill xmlns:a="http://schemas.openxmlformats.org/drawingml/2006/main"/>
+          <a:ln xmlns:a="http://schemas.openxmlformats.org/drawingml/2006/main" w="0">
+            <a:noFill/>
+          </a:ln>
+        </p:spPr>
+        <p:txBody>
+          <a:bodyPr xmlns:a="http://schemas.openxmlformats.org/drawingml/2006/main" wrap="square" lIns="0" tIns="0" rIns="0" bIns="0" anchor="t">
+            <a:noAutofit/>
+          </a:bodyPr>
+          <a:lstStyle xmlns:a="http://schemas.openxmlformats.org/drawingml/2006/main"/>
+          <a:p xmlns:a="http://schemas.openxmlformats.org/drawingml/2006/main">
+            <a:pPr>
+              <a:lnSpc>
+                <a:spcPct val="110000"/>
+              </a:lnSpc>
+              <a:buNone/>
+              <a:defRPr sz="1425" b="0">
+                <a:solidFill>
+                  <a:srgbClr val="58645D"/>
+                </a:solidFill>
+                <a:latin typeface="Helvetica Neue"/>
+                <a:ea typeface="Helvetica Neue"/>
+                <a:cs typeface="Helvetica Neue"/>
+              </a:defRPr>
+            </a:pPr>
+            <a:r>
+              <a:rPr sz="1425" b="0">
+                <a:solidFill>
+                  <a:srgbClr val="58645D"/>
+                </a:solidFill>
+                <a:latin typeface="Helvetica Neue"/>
+                <a:ea typeface="Helvetica Neue"/>
+                <a:cs typeface="Helvetica Neue"/>
+              </a:rPr>
+              <a:t>Survey findings · Oak + Qasim, 2025</a:t>
+            </a:r>
+          </a:p>
+          <a:p xmlns:a="http://schemas.openxmlformats.org/drawingml/2006/main">
+            <a:pPr>
+              <a:lnSpc>
+                <a:spcPct val="110000"/>
+              </a:lnSpc>
+              <a:buNone/>
+              <a:defRPr sz="1425" b="0">
+                <a:solidFill>
+                  <a:srgbClr val="58645D"/>
+                </a:solidFill>
+                <a:latin typeface="Helvetica Neue"/>
+                <a:ea typeface="Helvetica Neue"/>
+                <a:cs typeface="Helvetica Neue"/>
+              </a:defRPr>
+            </a:pPr>
+            <a:r>
+              <a:rPr sz="1425" b="0">
+                <a:solidFill>
+                  <a:srgbClr val="58645D"/>
+                </a:solidFill>
+                <a:latin typeface="Helvetica Neue"/>
+                <a:ea typeface="Helvetica Neue"/>
+                <a:cs typeface="Helvetica Neue"/>
+              </a:rPr>
+              <a:t>Reformatted from the original report</a:t>
+            </a:r>
+          </a:p>
+        </p:txBody>
+      </p:sp>
+      <p:sp>
+        <p:nvSpPr>
+          <p:cNvPr id="6" name="cover-scope">
+            <a:extLst xmlns:a="http://schemas.openxmlformats.org/drawingml/2006/main">
+              <a:ext uri="{FF2B5EF4-FFF2-40B4-BE49-F238E27FC236}">
+                <a16:creationId xmlns:a16="http://schemas.microsoft.com/office/drawing/2014/main" id="{90168797-6137-47A3-9BC7-45A89EABEFB1}"/>
+              </a:ext>
+            </a:extLst>
+          </p:cNvPr>
+          <p:cNvSpPr>
+            <a:spLocks xmlns:a="http://schemas.openxmlformats.org/drawingml/2006/main" noGrp="1"/>
+          </p:cNvSpPr>
+          <p:nvPr/>
+        </p:nvSpPr>
+        <p:spPr>
+          <a:xfrm xmlns:a="http://schemas.openxmlformats.org/drawingml/2006/main">
+            <a:off x="647700" y="6115050"/>
+            <a:ext cx="5219700" cy="304800"/>
+          </a:xfrm>
+          <a:prstGeom xmlns:a="http://schemas.openxmlformats.org/drawingml/2006/main" prst="rect">
+            <a:avLst/>
+          </a:prstGeom>
+          <a:noFill xmlns:a="http://schemas.openxmlformats.org/drawingml/2006/main"/>
+          <a:ln xmlns:a="http://schemas.openxmlformats.org/drawingml/2006/main" w="0">
+            <a:noFill/>
+          </a:ln>
+        </p:spPr>
+        <p:txBody>
+          <a:bodyPr xmlns:a="http://schemas.openxmlformats.org/drawingml/2006/main" wrap="square" lIns="0" tIns="0" rIns="0" bIns="0" anchor="t">
+            <a:noAutofit/>
+          </a:bodyPr>
+          <a:lstStyle xmlns:a="http://schemas.openxmlformats.org/drawingml/2006/main"/>
+          <a:p xmlns:a="http://schemas.openxmlformats.org/drawingml/2006/main">
+            <a:pPr>
+              <a:lnSpc>
+                <a:spcPct val="110000"/>
+              </a:lnSpc>
+              <a:buNone/>
+              <a:defRPr sz="1425" b="0">
                 <a:solidFill>
                   <a:srgbClr val="244D3C"/>
                 </a:solidFill>
@@ -2021,7 +2397,7 @@
               </a:defRPr>
             </a:pPr>
             <a:r>
-              <a:rPr sz="1200" b="1">
+              <a:rPr sz="1425" b="0">
                 <a:solidFill>
                   <a:srgbClr val="244D3C"/>
                 </a:solidFill>
@@ -2029,243 +2405,6 @@
                 <a:ea typeface="Helvetica Neue"/>
                 <a:cs typeface="Helvetica Neue"/>
               </a:rPr>
-              <a:t>KYLE HOBSON   /   UX RESEARCH</a:t>
-            </a:r>
-          </a:p>
-        </p:txBody>
-      </p:sp>
-      <p:sp>
-        <p:nvSpPr>
-          <p:cNvPr id="3" name="headline">
-            <a:extLst xmlns:a="http://schemas.openxmlformats.org/drawingml/2006/main">
-              <a:ext uri="{FF2B5EF4-FFF2-40B4-BE49-F238E27FC236}">
-                <a16:creationId xmlns:a16="http://schemas.microsoft.com/office/drawing/2014/main" id="{058FE251-A22F-4362-AC6A-80E4F5E67F14}"/>
-              </a:ext>
-            </a:extLst>
-          </p:cNvPr>
-          <p:cNvSpPr>
-            <a:spLocks xmlns:a="http://schemas.openxmlformats.org/drawingml/2006/main" noGrp="1"/>
-          </p:cNvSpPr>
-          <p:nvPr/>
-        </p:nvSpPr>
-        <p:spPr>
-          <a:xfrm xmlns:a="http://schemas.openxmlformats.org/drawingml/2006/main">
-            <a:off x="609600" y="1552575"/>
-            <a:ext cx="8086725" cy="1752600"/>
-          </a:xfrm>
-          <a:prstGeom xmlns:a="http://schemas.openxmlformats.org/drawingml/2006/main" prst="rect">
-            <a:avLst/>
-          </a:prstGeom>
-          <a:noFill xmlns:a="http://schemas.openxmlformats.org/drawingml/2006/main"/>
-          <a:ln xmlns:a="http://schemas.openxmlformats.org/drawingml/2006/main" w="0">
-            <a:noFill/>
-          </a:ln>
-        </p:spPr>
-        <p:txBody>
-          <a:bodyPr xmlns:a="http://schemas.openxmlformats.org/drawingml/2006/main" wrap="square" lIns="0" tIns="0" rIns="0" bIns="0" anchor="t">
-            <a:noAutofit/>
-          </a:bodyPr>
-          <a:lstStyle xmlns:a="http://schemas.openxmlformats.org/drawingml/2006/main"/>
-          <a:p xmlns:a="http://schemas.openxmlformats.org/drawingml/2006/main">
-            <a:pPr>
-              <a:lnSpc>
-                <a:spcPct val="110000"/>
-              </a:lnSpc>
-              <a:buNone/>
-              <a:defRPr sz="4500" b="1">
-                <a:solidFill>
-                  <a:srgbClr val="192B25"/>
-                </a:solidFill>
-                <a:latin typeface="Helvetica Neue"/>
-                <a:ea typeface="Helvetica Neue"/>
-                <a:cs typeface="Helvetica Neue"/>
-              </a:defRPr>
-            </a:pPr>
-            <a:r>
-              <a:rPr sz="4500" b="1">
-                <a:solidFill>
-                  <a:srgbClr val="192B25"/>
-                </a:solidFill>
-                <a:latin typeface="Helvetica Neue"/>
-                <a:ea typeface="Helvetica Neue"/>
-                <a:cs typeface="Helvetica Neue"/>
-              </a:rPr>
-              <a:t>Research for the</a:t>
-            </a:r>
-          </a:p>
-          <a:p xmlns:a="http://schemas.openxmlformats.org/drawingml/2006/main">
-            <a:pPr>
-              <a:lnSpc>
-                <a:spcPct val="110000"/>
-              </a:lnSpc>
-              <a:buNone/>
-              <a:defRPr sz="4500" b="1">
-                <a:solidFill>
-                  <a:srgbClr val="192B25"/>
-                </a:solidFill>
-                <a:latin typeface="Helvetica Neue"/>
-                <a:ea typeface="Helvetica Neue"/>
-                <a:cs typeface="Helvetica Neue"/>
-              </a:defRPr>
-            </a:pPr>
-            <a:r>
-              <a:rPr sz="4500" b="1">
-                <a:solidFill>
-                  <a:srgbClr val="192B25"/>
-                </a:solidFill>
-                <a:latin typeface="Helvetica Neue"/>
-                <a:ea typeface="Helvetica Neue"/>
-                <a:cs typeface="Helvetica Neue"/>
-              </a:rPr>
-              <a:t>next product decision</a:t>
-            </a:r>
-          </a:p>
-        </p:txBody>
-      </p:sp>
-      <p:sp>
-        <p:nvSpPr>
-          <p:cNvPr id="4" name="cover-intro">
-            <a:extLst xmlns:a="http://schemas.openxmlformats.org/drawingml/2006/main">
-              <a:ext uri="{FF2B5EF4-FFF2-40B4-BE49-F238E27FC236}">
-                <a16:creationId xmlns:a16="http://schemas.microsoft.com/office/drawing/2014/main" id="{015AEA1D-41E1-4694-B889-621D616F063A}"/>
-              </a:ext>
-            </a:extLst>
-          </p:cNvPr>
-          <p:cNvSpPr>
-            <a:spLocks xmlns:a="http://schemas.openxmlformats.org/drawingml/2006/main" noGrp="1"/>
-          </p:cNvSpPr>
-          <p:nvPr/>
-        </p:nvSpPr>
-        <p:spPr>
-          <a:xfrm xmlns:a="http://schemas.openxmlformats.org/drawingml/2006/main">
-            <a:off x="647700" y="3971925"/>
-            <a:ext cx="7229475" cy="933450"/>
-          </a:xfrm>
-          <a:prstGeom xmlns:a="http://schemas.openxmlformats.org/drawingml/2006/main" prst="rect">
-            <a:avLst/>
-          </a:prstGeom>
-          <a:noFill xmlns:a="http://schemas.openxmlformats.org/drawingml/2006/main"/>
-          <a:ln xmlns:a="http://schemas.openxmlformats.org/drawingml/2006/main" w="0">
-            <a:noFill/>
-          </a:ln>
-        </p:spPr>
-        <p:txBody>
-          <a:bodyPr xmlns:a="http://schemas.openxmlformats.org/drawingml/2006/main" wrap="square" lIns="0" tIns="0" rIns="0" bIns="0" anchor="t">
-            <a:noAutofit/>
-          </a:bodyPr>
-          <a:lstStyle xmlns:a="http://schemas.openxmlformats.org/drawingml/2006/main"/>
-          <a:p xmlns:a="http://schemas.openxmlformats.org/drawingml/2006/main">
-            <a:pPr>
-              <a:lnSpc>
-                <a:spcPct val="110000"/>
-              </a:lnSpc>
-              <a:buNone/>
-              <a:defRPr sz="2100" b="0">
-                <a:solidFill>
-                  <a:srgbClr val="192B25"/>
-                </a:solidFill>
-                <a:latin typeface="Helvetica Neue"/>
-                <a:ea typeface="Helvetica Neue"/>
-                <a:cs typeface="Helvetica Neue"/>
-              </a:defRPr>
-            </a:pPr>
-            <a:r>
-              <a:rPr sz="2100" b="0">
-                <a:solidFill>
-                  <a:srgbClr val="192B25"/>
-                </a:solidFill>
-                <a:latin typeface="Helvetica Neue"/>
-                <a:ea typeface="Helvetica Neue"/>
-                <a:cs typeface="Helvetica Neue"/>
-              </a:rPr>
-              <a:t>I study where people get stuck so teams can</a:t>
-            </a:r>
-          </a:p>
-          <a:p xmlns:a="http://schemas.openxmlformats.org/drawingml/2006/main">
-            <a:pPr>
-              <a:lnSpc>
-                <a:spcPct val="110000"/>
-              </a:lnSpc>
-              <a:buNone/>
-              <a:defRPr sz="2100" b="0">
-                <a:solidFill>
-                  <a:srgbClr val="192B25"/>
-                </a:solidFill>
-                <a:latin typeface="Helvetica Neue"/>
-                <a:ea typeface="Helvetica Neue"/>
-                <a:cs typeface="Helvetica Neue"/>
-              </a:defRPr>
-            </a:pPr>
-            <a:r>
-              <a:rPr sz="2100" b="0">
-                <a:solidFill>
-                  <a:srgbClr val="192B25"/>
-                </a:solidFill>
-                <a:latin typeface="Helvetica Neue"/>
-                <a:ea typeface="Helvetica Neue"/>
-                <a:cs typeface="Helvetica Neue"/>
-              </a:rPr>
-              <a:t>make better product decisions.</a:t>
-            </a:r>
-          </a:p>
-        </p:txBody>
-      </p:sp>
-      <p:sp>
-        <p:nvSpPr>
-          <p:cNvPr id="5" name="cover-scope">
-            <a:extLst xmlns:a="http://schemas.openxmlformats.org/drawingml/2006/main">
-              <a:ext uri="{FF2B5EF4-FFF2-40B4-BE49-F238E27FC236}">
-                <a16:creationId xmlns:a16="http://schemas.microsoft.com/office/drawing/2014/main" id="{DF8A9157-BB80-4D48-BD5F-2F02096E207F}"/>
-              </a:ext>
-            </a:extLst>
-          </p:cNvPr>
-          <p:cNvSpPr>
-            <a:spLocks xmlns:a="http://schemas.openxmlformats.org/drawingml/2006/main" noGrp="1"/>
-          </p:cNvSpPr>
-          <p:nvPr/>
-        </p:nvSpPr>
-        <p:spPr>
-          <a:xfrm xmlns:a="http://schemas.openxmlformats.org/drawingml/2006/main">
-            <a:off x="647700" y="6000750"/>
-            <a:ext cx="6572250" cy="304800"/>
-          </a:xfrm>
-          <a:prstGeom xmlns:a="http://schemas.openxmlformats.org/drawingml/2006/main" prst="rect">
-            <a:avLst/>
-          </a:prstGeom>
-          <a:noFill xmlns:a="http://schemas.openxmlformats.org/drawingml/2006/main"/>
-          <a:ln xmlns:a="http://schemas.openxmlformats.org/drawingml/2006/main" w="0">
-            <a:noFill/>
-          </a:ln>
-        </p:spPr>
-        <p:txBody>
-          <a:bodyPr xmlns:a="http://schemas.openxmlformats.org/drawingml/2006/main" wrap="square" lIns="0" tIns="0" rIns="0" bIns="0" anchor="t">
-            <a:noAutofit/>
-          </a:bodyPr>
-          <a:lstStyle xmlns:a="http://schemas.openxmlformats.org/drawingml/2006/main"/>
-          <a:p xmlns:a="http://schemas.openxmlformats.org/drawingml/2006/main">
-            <a:pPr>
-              <a:lnSpc>
-                <a:spcPct val="110000"/>
-              </a:lnSpc>
-              <a:buNone/>
-              <a:defRPr sz="1425" b="0">
-                <a:solidFill>
-                  <a:srgbClr val="192B25"/>
-                </a:solidFill>
-                <a:latin typeface="Helvetica Neue"/>
-                <a:ea typeface="Helvetica Neue"/>
-                <a:cs typeface="Helvetica Neue"/>
-              </a:defRPr>
-            </a:pPr>
-            <a:r>
-              <a:rPr sz="1425" b="0">
-                <a:solidFill>
-                  <a:srgbClr val="192B25"/>
-                </a:solidFill>
-                <a:latin typeface="Helvetica Neue"/>
-                <a:ea typeface="Helvetica Neue"/>
-                <a:cs typeface="Helvetica Neue"/>
-              </a:rPr>
               <a:t>Selected research, 2023–2025</a:t>
             </a:r>
           </a:p>
@@ -2273,10 +2412,10 @@
       </p:sp>
       <p:sp>
         <p:nvSpPr>
-          <p:cNvPr id="6" name="slide-number">
-            <a:extLst xmlns:a="http://schemas.openxmlformats.org/drawingml/2006/main">
-              <a:ext uri="{FF2B5EF4-FFF2-40B4-BE49-F238E27FC236}">
-                <a16:creationId xmlns:a16="http://schemas.microsoft.com/office/drawing/2014/main" id="{0B486A7E-B589-4396-9F23-D088BE86C569}"/>
+          <p:cNvPr id="7" name="slide-number">
+            <a:extLst xmlns:a="http://schemas.openxmlformats.org/drawingml/2006/main">
+              <a:ext uri="{FF2B5EF4-FFF2-40B4-BE49-F238E27FC236}">
+                <a16:creationId xmlns:a16="http://schemas.microsoft.com/office/drawing/2014/main" id="{D3C537F8-E25E-42C4-BC77-E976CA2F8716}"/>
               </a:ext>
             </a:extLst>
           </p:cNvPr>
@@ -2335,7 +2474,7 @@
     </p:spTree>
     <p:extLst>
       <p:ext uri="{BB962C8B-B14F-4D97-AF65-F5344CB8AC3E}">
-        <p14:creationId xmlns:p14="http://schemas.microsoft.com/office/powerpoint/2010/main" val="1970665068"/>
+        <p14:creationId xmlns:p14="http://schemas.microsoft.com/office/powerpoint/2010/main" val="2062948983"/>
       </p:ext>
     </p:extLst>
   </p:cSld>
@@ -2366,7 +2505,7 @@
           <p:cNvPr id="7" name="section-label">
             <a:extLst xmlns:a="http://schemas.openxmlformats.org/drawingml/2006/main">
               <a:ext uri="{FF2B5EF4-FFF2-40B4-BE49-F238E27FC236}">
-                <a16:creationId xmlns:a16="http://schemas.microsoft.com/office/drawing/2014/main" id="{C4ED421D-EFEA-4966-96A0-4A0D5917352C}"/>
+                <a16:creationId xmlns:a16="http://schemas.microsoft.com/office/drawing/2014/main" id="{5E1833BB-3A15-4973-AF92-DF90EB8938CF}"/>
               </a:ext>
             </a:extLst>
           </p:cNvPr>
@@ -2427,7 +2566,7 @@
           <p:cNvPr id="2" name="headline">
             <a:extLst xmlns:a="http://schemas.openxmlformats.org/drawingml/2006/main">
               <a:ext uri="{FF2B5EF4-FFF2-40B4-BE49-F238E27FC236}">
-                <a16:creationId xmlns:a16="http://schemas.microsoft.com/office/drawing/2014/main" id="{53E257D2-A346-4A81-BBB4-3F598C0B16AB}"/>
+                <a16:creationId xmlns:a16="http://schemas.microsoft.com/office/drawing/2014/main" id="{B7383B7F-8AB9-4A72-8ADA-C7B96896C919}"/>
               </a:ext>
             </a:extLst>
           </p:cNvPr>
@@ -2515,7 +2654,7 @@
           <p:cNvPr id="3" name="documentary-story">
             <a:extLst xmlns:a="http://schemas.openxmlformats.org/drawingml/2006/main">
               <a:ext uri="{FF2B5EF4-FFF2-40B4-BE49-F238E27FC236}">
-                <a16:creationId xmlns:a16="http://schemas.microsoft.com/office/drawing/2014/main" id="{AE95C44B-958F-44CA-8B7C-DAA67C7135A4}"/>
+                <a16:creationId xmlns:a16="http://schemas.microsoft.com/office/drawing/2014/main" id="{D7D78637-5F9D-4614-888D-40E3588FFCBB}"/>
               </a:ext>
             </a:extLst>
           </p:cNvPr>
@@ -2576,7 +2715,7 @@
           <p:cNvPr id="4" name="current-context">
             <a:extLst xmlns:a="http://schemas.openxmlformats.org/drawingml/2006/main">
               <a:ext uri="{FF2B5EF4-FFF2-40B4-BE49-F238E27FC236}">
-                <a16:creationId xmlns:a16="http://schemas.microsoft.com/office/drawing/2014/main" id="{F9E55889-9B77-4CBC-AB84-B810EFB6821E}"/>
+                <a16:creationId xmlns:a16="http://schemas.microsoft.com/office/drawing/2014/main" id="{8046C688-21E7-4708-B290-8465F032FFDB}"/>
               </a:ext>
             </a:extLst>
           </p:cNvPr>
@@ -2641,7 +2780,7 @@
           <p:nvPr/>
         </p:nvPicPr>
         <p:blipFill>
-          <a:blip xmlns:r="http://schemas.openxmlformats.org/officeDocument/2006/relationships" xmlns:a="http://schemas.openxmlformats.org/drawingml/2006/main" r:embed="R0bb2e96e5dbe4f08"/>
+          <a:blip xmlns:r="http://schemas.openxmlformats.org/officeDocument/2006/relationships" xmlns:a="http://schemas.openxmlformats.org/drawingml/2006/main" r:embed="R4d274e6e92e34493"/>
           <a:stretch xmlns:a="http://schemas.openxmlformats.org/drawingml/2006/main"/>
         </p:blipFill>
         <p:spPr>
@@ -2659,7 +2798,7 @@
           <p:cNvPr id="6" name="slide-number">
             <a:extLst xmlns:a="http://schemas.openxmlformats.org/drawingml/2006/main">
               <a:ext uri="{FF2B5EF4-FFF2-40B4-BE49-F238E27FC236}">
-                <a16:creationId xmlns:a16="http://schemas.microsoft.com/office/drawing/2014/main" id="{4999A05D-86CA-4DD4-B257-DBE09780C77F}"/>
+                <a16:creationId xmlns:a16="http://schemas.microsoft.com/office/drawing/2014/main" id="{45F8F262-A2F8-4FB4-B4B5-43225C7C52BC}"/>
               </a:ext>
             </a:extLst>
           </p:cNvPr>
@@ -2718,7 +2857,7 @@
     </p:spTree>
     <p:extLst>
       <p:ext uri="{BB962C8B-B14F-4D97-AF65-F5344CB8AC3E}">
-        <p14:creationId xmlns:p14="http://schemas.microsoft.com/office/powerpoint/2010/main" val="1242885454"/>
+        <p14:creationId xmlns:p14="http://schemas.microsoft.com/office/powerpoint/2010/main" val="1990944926"/>
       </p:ext>
     </p:extLst>
   </p:cSld>
@@ -2749,7 +2888,7 @@
           <p:cNvPr id="7" name="section-label">
             <a:extLst xmlns:a="http://schemas.openxmlformats.org/drawingml/2006/main">
               <a:ext uri="{FF2B5EF4-FFF2-40B4-BE49-F238E27FC236}">
-                <a16:creationId xmlns:a16="http://schemas.microsoft.com/office/drawing/2014/main" id="{4169E1DB-2129-494D-A954-3E5084133425}"/>
+                <a16:creationId xmlns:a16="http://schemas.microsoft.com/office/drawing/2014/main" id="{0D20EF9F-6263-486F-8324-4AC486D3B7D1}"/>
               </a:ext>
             </a:extLst>
           </p:cNvPr>
@@ -2810,7 +2949,7 @@
           <p:cNvPr id="2" name="headline">
             <a:extLst xmlns:a="http://schemas.openxmlformats.org/drawingml/2006/main">
               <a:ext uri="{FF2B5EF4-FFF2-40B4-BE49-F238E27FC236}">
-                <a16:creationId xmlns:a16="http://schemas.microsoft.com/office/drawing/2014/main" id="{ACAEF897-FE12-4D49-B576-E481BD300621}"/>
+                <a16:creationId xmlns:a16="http://schemas.microsoft.com/office/drawing/2014/main" id="{00382768-FD1D-4194-9743-EAE1ED2F603C}"/>
               </a:ext>
             </a:extLst>
           </p:cNvPr>
@@ -2898,7 +3037,7 @@
           <p:cNvPr id="3" name="contact-intent">
             <a:extLst xmlns:a="http://schemas.openxmlformats.org/drawingml/2006/main">
               <a:ext uri="{FF2B5EF4-FFF2-40B4-BE49-F238E27FC236}">
-                <a16:creationId xmlns:a16="http://schemas.microsoft.com/office/drawing/2014/main" id="{32ADFB9A-8874-4D13-87CB-FBC1E112C2ED}"/>
+                <a16:creationId xmlns:a16="http://schemas.microsoft.com/office/drawing/2014/main" id="{8E61413C-D23D-441C-ABD4-62BAB40B3049}"/>
               </a:ext>
             </a:extLst>
           </p:cNvPr>
@@ -2959,7 +3098,7 @@
           <p:cNvPr id="4" name="email">
             <a:extLst xmlns:a="http://schemas.openxmlformats.org/drawingml/2006/main">
               <a:ext uri="{FF2B5EF4-FFF2-40B4-BE49-F238E27FC236}">
-                <a16:creationId xmlns:a16="http://schemas.microsoft.com/office/drawing/2014/main" id="{1B1C8C68-0812-4BB1-8012-5B4F05E0882D}"/>
+                <a16:creationId xmlns:a16="http://schemas.microsoft.com/office/drawing/2014/main" id="{2F175D7A-A9F9-4AE6-A5DD-CFA675856612}"/>
               </a:ext>
             </a:extLst>
           </p:cNvPr>
@@ -3009,7 +3148,7 @@
                 <a:latin typeface="Helvetica Neue"/>
                 <a:ea typeface="Helvetica Neue"/>
                 <a:cs typeface="Helvetica Neue"/>
-                <a:hlinkClick xmlns:r="http://schemas.openxmlformats.org/officeDocument/2006/relationships" r:id="Rf8aa8d4b0983434e"/>
+                <a:hlinkClick xmlns:r="http://schemas.openxmlformats.org/officeDocument/2006/relationships" r:id="R70b62d61f08e4bf0"/>
               </a:rPr>
               <a:t>JonathanKyleHobson@gmail.com</a:t>
             </a:r>
@@ -3021,7 +3160,7 @@
           <p:cNvPr id="5" name="portfolio">
             <a:extLst xmlns:a="http://schemas.openxmlformats.org/drawingml/2006/main">
               <a:ext uri="{FF2B5EF4-FFF2-40B4-BE49-F238E27FC236}">
-                <a16:creationId xmlns:a16="http://schemas.microsoft.com/office/drawing/2014/main" id="{123DACFF-3C11-4A19-9348-27F43BBF7F83}"/>
+                <a16:creationId xmlns:a16="http://schemas.microsoft.com/office/drawing/2014/main" id="{E0D76934-1625-4D8A-B0C1-E5EB3A42D1CF}"/>
               </a:ext>
             </a:extLst>
           </p:cNvPr>
@@ -3071,7 +3210,7 @@
                 <a:latin typeface="Helvetica Neue"/>
                 <a:ea typeface="Helvetica Neue"/>
                 <a:cs typeface="Helvetica Neue"/>
-                <a:hlinkClick xmlns:r="http://schemas.openxmlformats.org/officeDocument/2006/relationships" r:id="R85f1b44b9a654ff7"/>
+                <a:hlinkClick xmlns:r="http://schemas.openxmlformats.org/officeDocument/2006/relationships" r:id="R960fef0947154766"/>
               </a:rPr>
               <a:t>jonathankhobson.github.io/portfolio/research</a:t>
             </a:r>
@@ -3083,7 +3222,7 @@
           <p:cNvPr id="6" name="slide-number">
             <a:extLst xmlns:a="http://schemas.openxmlformats.org/drawingml/2006/main">
               <a:ext uri="{FF2B5EF4-FFF2-40B4-BE49-F238E27FC236}">
-                <a16:creationId xmlns:a16="http://schemas.microsoft.com/office/drawing/2014/main" id="{5474F4FE-4105-4251-8942-9BD4AD015597}"/>
+                <a16:creationId xmlns:a16="http://schemas.microsoft.com/office/drawing/2014/main" id="{DB3B539E-4B3C-4A63-9ACE-6D6C99E9D981}"/>
               </a:ext>
             </a:extLst>
           </p:cNvPr>
@@ -3142,7 +3281,7 @@
     </p:spTree>
     <p:extLst>
       <p:ext uri="{BB962C8B-B14F-4D97-AF65-F5344CB8AC3E}">
-        <p14:creationId xmlns:p14="http://schemas.microsoft.com/office/powerpoint/2010/main" val="887684241"/>
+        <p14:creationId xmlns:p14="http://schemas.microsoft.com/office/powerpoint/2010/main" val="1911509942"/>
       </p:ext>
     </p:extLst>
   </p:cSld>
@@ -3173,7 +3312,7 @@
           <p:cNvPr id="9" name="section-label">
             <a:extLst xmlns:a="http://schemas.openxmlformats.org/drawingml/2006/main">
               <a:ext uri="{FF2B5EF4-FFF2-40B4-BE49-F238E27FC236}">
-                <a16:creationId xmlns:a16="http://schemas.microsoft.com/office/drawing/2014/main" id="{7737DFAB-2B75-4FA7-8D65-B8665A1942AD}"/>
+                <a16:creationId xmlns:a16="http://schemas.microsoft.com/office/drawing/2014/main" id="{F4027961-6892-4A43-B482-797FE9939396}"/>
               </a:ext>
             </a:extLst>
           </p:cNvPr>
@@ -3234,7 +3373,7 @@
           <p:cNvPr id="2" name="headline">
             <a:extLst xmlns:a="http://schemas.openxmlformats.org/drawingml/2006/main">
               <a:ext uri="{FF2B5EF4-FFF2-40B4-BE49-F238E27FC236}">
-                <a16:creationId xmlns:a16="http://schemas.microsoft.com/office/drawing/2014/main" id="{F9B27C5F-C888-40DC-A482-F35367B98B96}"/>
+                <a16:creationId xmlns:a16="http://schemas.microsoft.com/office/drawing/2014/main" id="{3FC6C6B2-2D60-47DC-A492-26911D4E1103}"/>
               </a:ext>
             </a:extLst>
           </p:cNvPr>
@@ -3322,7 +3461,7 @@
           <p:cNvPr id="3" name="survey-role">
             <a:extLst xmlns:a="http://schemas.openxmlformats.org/drawingml/2006/main">
               <a:ext uri="{FF2B5EF4-FFF2-40B4-BE49-F238E27FC236}">
-                <a16:creationId xmlns:a16="http://schemas.microsoft.com/office/drawing/2014/main" id="{FE36B734-83E9-479E-BD05-97A8B417A8B7}"/>
+                <a16:creationId xmlns:a16="http://schemas.microsoft.com/office/drawing/2014/main" id="{D2634128-3C43-41D7-89B4-3FFA11D067F3}"/>
               </a:ext>
             </a:extLst>
           </p:cNvPr>
@@ -3383,7 +3522,7 @@
           <p:cNvPr id="4" name="survey-method">
             <a:extLst xmlns:a="http://schemas.openxmlformats.org/drawingml/2006/main">
               <a:ext uri="{FF2B5EF4-FFF2-40B4-BE49-F238E27FC236}">
-                <a16:creationId xmlns:a16="http://schemas.microsoft.com/office/drawing/2014/main" id="{26656E34-CBD9-4B90-A44D-A35DD6172F0B}"/>
+                <a16:creationId xmlns:a16="http://schemas.microsoft.com/office/drawing/2014/main" id="{95F6B40D-7131-458D-A524-333DF88C66C6}"/>
               </a:ext>
             </a:extLst>
           </p:cNvPr>
@@ -3444,7 +3583,7 @@
           <p:cNvPr id="5" name="survey-tradeoff">
             <a:extLst xmlns:a="http://schemas.openxmlformats.org/drawingml/2006/main">
               <a:ext uri="{FF2B5EF4-FFF2-40B4-BE49-F238E27FC236}">
-                <a16:creationId xmlns:a16="http://schemas.microsoft.com/office/drawing/2014/main" id="{6EC13974-5571-41C9-B638-A3956D2FE619}"/>
+                <a16:creationId xmlns:a16="http://schemas.microsoft.com/office/drawing/2014/main" id="{EBB9362C-CB4C-4206-9875-5F62730BD95A}"/>
               </a:ext>
             </a:extLst>
           </p:cNvPr>
@@ -3509,7 +3648,7 @@
           <p:nvPr/>
         </p:nvPicPr>
         <p:blipFill>
-          <a:blip xmlns:r="http://schemas.openxmlformats.org/officeDocument/2006/relationships" xmlns:a="http://schemas.openxmlformats.org/drawingml/2006/main" r:embed="R6175bdb0a5aa4d4c"/>
+          <a:blip xmlns:r="http://schemas.openxmlformats.org/officeDocument/2006/relationships" xmlns:a="http://schemas.openxmlformats.org/drawingml/2006/main" r:embed="R8df06ab509dd4819"/>
           <a:stretch xmlns:a="http://schemas.openxmlformats.org/drawingml/2006/main"/>
         </p:blipFill>
         <p:spPr>
@@ -3527,7 +3666,7 @@
           <p:cNvPr id="7" name="sample-caption">
             <a:extLst xmlns:a="http://schemas.openxmlformats.org/drawingml/2006/main">
               <a:ext uri="{FF2B5EF4-FFF2-40B4-BE49-F238E27FC236}">
-                <a16:creationId xmlns:a16="http://schemas.microsoft.com/office/drawing/2014/main" id="{BBB8102C-031B-492B-BE75-FB366DE53B1A}"/>
+                <a16:creationId xmlns:a16="http://schemas.microsoft.com/office/drawing/2014/main" id="{3867154F-2E3D-4503-92B0-0BFE5170C498}"/>
               </a:ext>
             </a:extLst>
           </p:cNvPr>
@@ -3615,7 +3754,7 @@
           <p:cNvPr id="8" name="slide-number">
             <a:extLst xmlns:a="http://schemas.openxmlformats.org/drawingml/2006/main">
               <a:ext uri="{FF2B5EF4-FFF2-40B4-BE49-F238E27FC236}">
-                <a16:creationId xmlns:a16="http://schemas.microsoft.com/office/drawing/2014/main" id="{696EC317-51A6-477C-95A7-ACBB10FF9720}"/>
+                <a16:creationId xmlns:a16="http://schemas.microsoft.com/office/drawing/2014/main" id="{5E637230-55A8-4739-8A0D-2BF786969FA6}"/>
               </a:ext>
             </a:extLst>
           </p:cNvPr>
@@ -3674,7 +3813,7 @@
     </p:spTree>
     <p:extLst>
       <p:ext uri="{BB962C8B-B14F-4D97-AF65-F5344CB8AC3E}">
-        <p14:creationId xmlns:p14="http://schemas.microsoft.com/office/powerpoint/2010/main" val="752514322"/>
+        <p14:creationId xmlns:p14="http://schemas.microsoft.com/office/powerpoint/2010/main" val="1286407239"/>
       </p:ext>
     </p:extLst>
   </p:cSld>
@@ -3705,7 +3844,7 @@
           <p:cNvPr id="8" name="section-label">
             <a:extLst xmlns:a="http://schemas.openxmlformats.org/drawingml/2006/main">
               <a:ext uri="{FF2B5EF4-FFF2-40B4-BE49-F238E27FC236}">
-                <a16:creationId xmlns:a16="http://schemas.microsoft.com/office/drawing/2014/main" id="{2256EA71-6311-4048-94E2-B7D8D30AED6E}"/>
+                <a16:creationId xmlns:a16="http://schemas.microsoft.com/office/drawing/2014/main" id="{1A73C0B2-A898-494B-A344-9D1FA56A63F1}"/>
               </a:ext>
             </a:extLst>
           </p:cNvPr>
@@ -3766,7 +3905,7 @@
           <p:cNvPr id="2" name="headline">
             <a:extLst xmlns:a="http://schemas.openxmlformats.org/drawingml/2006/main">
               <a:ext uri="{FF2B5EF4-FFF2-40B4-BE49-F238E27FC236}">
-                <a16:creationId xmlns:a16="http://schemas.microsoft.com/office/drawing/2014/main" id="{14A87682-91EB-4AA4-B99D-BE9C7553A014}"/>
+                <a16:creationId xmlns:a16="http://schemas.microsoft.com/office/drawing/2014/main" id="{25D8C8E6-2CE5-454B-ABEF-4402E653EBEE}"/>
               </a:ext>
             </a:extLst>
           </p:cNvPr>
@@ -3831,7 +3970,7 @@
           <p:nvPr/>
         </p:nvPicPr>
         <p:blipFill>
-          <a:blip xmlns:r="http://schemas.openxmlformats.org/officeDocument/2006/relationships" xmlns:a="http://schemas.openxmlformats.org/drawingml/2006/main" r:embed="R67b928dd372341c8"/>
+          <a:blip xmlns:r="http://schemas.openxmlformats.org/officeDocument/2006/relationships" xmlns:a="http://schemas.openxmlformats.org/drawingml/2006/main" r:embed="R327af1ff7a1d41f3"/>
           <a:stretch xmlns:a="http://schemas.openxmlformats.org/drawingml/2006/main"/>
         </p:blipFill>
         <p:spPr>
@@ -3849,7 +3988,7 @@
           <p:cNvPr id="4" name="original-report-caption">
             <a:extLst xmlns:a="http://schemas.openxmlformats.org/drawingml/2006/main">
               <a:ext uri="{FF2B5EF4-FFF2-40B4-BE49-F238E27FC236}">
-                <a16:creationId xmlns:a16="http://schemas.microsoft.com/office/drawing/2014/main" id="{88432B06-C349-4E7A-B083-A4C07411746D}"/>
+                <a16:creationId xmlns:a16="http://schemas.microsoft.com/office/drawing/2014/main" id="{4BB35B99-F9D3-445E-AD90-F7632D2953CE}"/>
               </a:ext>
             </a:extLst>
           </p:cNvPr>
@@ -3917,7 +4056,7 @@
         </p:xfrm>
         <a:graphic xmlns:a="http://schemas.openxmlformats.org/drawingml/2006/main">
           <a:graphicData uri="http://schemas.openxmlformats.org/drawingml/2006/chart">
-            <c:chart xmlns:r="http://schemas.openxmlformats.org/officeDocument/2006/relationships" xmlns:c="http://schemas.openxmlformats.org/drawingml/2006/chart" r:id="R7882c7cc3bf64206"/>
+            <c:chart xmlns:r="http://schemas.openxmlformats.org/officeDocument/2006/relationships" xmlns:c="http://schemas.openxmlformats.org/drawingml/2006/chart" r:id="R98d954ac55d74c64"/>
           </a:graphicData>
         </a:graphic>
       </p:graphicFrame>
@@ -3926,7 +4065,7 @@
           <p:cNvPr id="6" name="barrier-limit">
             <a:extLst xmlns:a="http://schemas.openxmlformats.org/drawingml/2006/main">
               <a:ext uri="{FF2B5EF4-FFF2-40B4-BE49-F238E27FC236}">
-                <a16:creationId xmlns:a16="http://schemas.microsoft.com/office/drawing/2014/main" id="{16C84191-26A3-4195-AD0D-CBDFB5B34230}"/>
+                <a16:creationId xmlns:a16="http://schemas.microsoft.com/office/drawing/2014/main" id="{B23864C8-D74D-4283-BE60-1AA3DA749BFF}"/>
               </a:ext>
             </a:extLst>
           </p:cNvPr>
@@ -3987,7 +4126,7 @@
           <p:cNvPr id="7" name="slide-number">
             <a:extLst xmlns:a="http://schemas.openxmlformats.org/drawingml/2006/main">
               <a:ext uri="{FF2B5EF4-FFF2-40B4-BE49-F238E27FC236}">
-                <a16:creationId xmlns:a16="http://schemas.microsoft.com/office/drawing/2014/main" id="{AEC07C65-0E38-430B-9516-C882E22AAFDD}"/>
+                <a16:creationId xmlns:a16="http://schemas.microsoft.com/office/drawing/2014/main" id="{AB541C34-5A20-4208-B199-631174CB506E}"/>
               </a:ext>
             </a:extLst>
           </p:cNvPr>
@@ -4046,7 +4185,7 @@
     </p:spTree>
     <p:extLst>
       <p:ext uri="{BB962C8B-B14F-4D97-AF65-F5344CB8AC3E}">
-        <p14:creationId xmlns:p14="http://schemas.microsoft.com/office/powerpoint/2010/main" val="592453109"/>
+        <p14:creationId xmlns:p14="http://schemas.microsoft.com/office/powerpoint/2010/main" val="1957656196"/>
       </p:ext>
     </p:extLst>
   </p:cSld>
@@ -4077,7 +4216,7 @@
           <p:cNvPr id="14" name="section-label">
             <a:extLst xmlns:a="http://schemas.openxmlformats.org/drawingml/2006/main">
               <a:ext uri="{FF2B5EF4-FFF2-40B4-BE49-F238E27FC236}">
-                <a16:creationId xmlns:a16="http://schemas.microsoft.com/office/drawing/2014/main" id="{7996B91E-7135-4166-BF96-2625A5DF6C38}"/>
+                <a16:creationId xmlns:a16="http://schemas.microsoft.com/office/drawing/2014/main" id="{8B4558D9-6F71-4710-B3AE-5A0D7F59FFF8}"/>
               </a:ext>
             </a:extLst>
           </p:cNvPr>
@@ -4138,7 +4277,7 @@
           <p:cNvPr id="2" name="headline">
             <a:extLst xmlns:a="http://schemas.openxmlformats.org/drawingml/2006/main">
               <a:ext uri="{FF2B5EF4-FFF2-40B4-BE49-F238E27FC236}">
-                <a16:creationId xmlns:a16="http://schemas.microsoft.com/office/drawing/2014/main" id="{2AFD2A59-5C6E-49C6-BF4F-0A70EC659242}"/>
+                <a16:creationId xmlns:a16="http://schemas.microsoft.com/office/drawing/2014/main" id="{304F6C48-96A1-4978-B00F-FD89A16D7A94}"/>
               </a:ext>
             </a:extLst>
           </p:cNvPr>
@@ -4199,7 +4338,7 @@
           <p:cNvPr id="3" name="proposal-context">
             <a:extLst xmlns:a="http://schemas.openxmlformats.org/drawingml/2006/main">
               <a:ext uri="{FF2B5EF4-FFF2-40B4-BE49-F238E27FC236}">
-                <a16:creationId xmlns:a16="http://schemas.microsoft.com/office/drawing/2014/main" id="{F64D6019-6C7D-4811-A552-1159071FEEDD}"/>
+                <a16:creationId xmlns:a16="http://schemas.microsoft.com/office/drawing/2014/main" id="{9CF30DE2-2D37-4AF7-A82A-E02B3A11F8AB}"/>
               </a:ext>
             </a:extLst>
           </p:cNvPr>
@@ -4260,7 +4399,7 @@
           <p:cNvPr id="4" name="finding-label">
             <a:extLst xmlns:a="http://schemas.openxmlformats.org/drawingml/2006/main">
               <a:ext uri="{FF2B5EF4-FFF2-40B4-BE49-F238E27FC236}">
-                <a16:creationId xmlns:a16="http://schemas.microsoft.com/office/drawing/2014/main" id="{80C37DB2-B7FC-483B-AF46-4C33E3A07AFC}"/>
+                <a16:creationId xmlns:a16="http://schemas.microsoft.com/office/drawing/2014/main" id="{E9C5BAC9-1A4C-4283-81E3-8FEDF01894E2}"/>
               </a:ext>
             </a:extLst>
           </p:cNvPr>
@@ -4321,7 +4460,7 @@
           <p:cNvPr id="5" name="direction-label">
             <a:extLst xmlns:a="http://schemas.openxmlformats.org/drawingml/2006/main">
               <a:ext uri="{FF2B5EF4-FFF2-40B4-BE49-F238E27FC236}">
-                <a16:creationId xmlns:a16="http://schemas.microsoft.com/office/drawing/2014/main" id="{27AC0EC8-0CC9-42B3-8465-BDEDE6ECC67B}"/>
+                <a16:creationId xmlns:a16="http://schemas.microsoft.com/office/drawing/2014/main" id="{2941B59D-3B7F-4EC0-870C-A14551C11DF1}"/>
               </a:ext>
             </a:extLst>
           </p:cNvPr>
@@ -4382,7 +4521,7 @@
           <p:cNvPr id="6" name="need-0">
             <a:extLst xmlns:a="http://schemas.openxmlformats.org/drawingml/2006/main">
               <a:ext uri="{FF2B5EF4-FFF2-40B4-BE49-F238E27FC236}">
-                <a16:creationId xmlns:a16="http://schemas.microsoft.com/office/drawing/2014/main" id="{5D75505A-44B8-4713-8E87-2CDA373E9659}"/>
+                <a16:creationId xmlns:a16="http://schemas.microsoft.com/office/drawing/2014/main" id="{F8E0FEFC-D24D-4010-8480-A421C2C64031}"/>
               </a:ext>
             </a:extLst>
           </p:cNvPr>
@@ -4443,7 +4582,7 @@
           <p:cNvPr id="7" name="direction-0">
             <a:extLst xmlns:a="http://schemas.openxmlformats.org/drawingml/2006/main">
               <a:ext uri="{FF2B5EF4-FFF2-40B4-BE49-F238E27FC236}">
-                <a16:creationId xmlns:a16="http://schemas.microsoft.com/office/drawing/2014/main" id="{B8AB2A09-4C5A-4991-8CF0-06FF7CEFA0A8}"/>
+                <a16:creationId xmlns:a16="http://schemas.microsoft.com/office/drawing/2014/main" id="{A2BFEF9B-22C0-4445-B57C-F34F67669BBB}"/>
               </a:ext>
             </a:extLst>
           </p:cNvPr>
@@ -4504,7 +4643,7 @@
           <p:cNvPr id="8" name="need-1">
             <a:extLst xmlns:a="http://schemas.openxmlformats.org/drawingml/2006/main">
               <a:ext uri="{FF2B5EF4-FFF2-40B4-BE49-F238E27FC236}">
-                <a16:creationId xmlns:a16="http://schemas.microsoft.com/office/drawing/2014/main" id="{6E28998B-4643-4556-A297-8C88C8E81840}"/>
+                <a16:creationId xmlns:a16="http://schemas.microsoft.com/office/drawing/2014/main" id="{F7687651-020F-4588-B7A9-EA5FA3B42598}"/>
               </a:ext>
             </a:extLst>
           </p:cNvPr>
@@ -4565,7 +4704,7 @@
           <p:cNvPr id="9" name="direction-1">
             <a:extLst xmlns:a="http://schemas.openxmlformats.org/drawingml/2006/main">
               <a:ext uri="{FF2B5EF4-FFF2-40B4-BE49-F238E27FC236}">
-                <a16:creationId xmlns:a16="http://schemas.microsoft.com/office/drawing/2014/main" id="{2B8A8659-D052-4C08-8095-C64929793BBA}"/>
+                <a16:creationId xmlns:a16="http://schemas.microsoft.com/office/drawing/2014/main" id="{832C788B-8EE6-4336-A622-D528663B20DD}"/>
               </a:ext>
             </a:extLst>
           </p:cNvPr>
@@ -4626,7 +4765,7 @@
           <p:cNvPr id="10" name="need-2">
             <a:extLst xmlns:a="http://schemas.openxmlformats.org/drawingml/2006/main">
               <a:ext uri="{FF2B5EF4-FFF2-40B4-BE49-F238E27FC236}">
-                <a16:creationId xmlns:a16="http://schemas.microsoft.com/office/drawing/2014/main" id="{899DF32D-0D5A-4685-B59F-5E66C0B23B6C}"/>
+                <a16:creationId xmlns:a16="http://schemas.microsoft.com/office/drawing/2014/main" id="{53FD9E33-AB45-4AE3-A4CA-508A4B3AF220}"/>
               </a:ext>
             </a:extLst>
           </p:cNvPr>
@@ -4687,7 +4826,7 @@
           <p:cNvPr id="11" name="direction-2">
             <a:extLst xmlns:a="http://schemas.openxmlformats.org/drawingml/2006/main">
               <a:ext uri="{FF2B5EF4-FFF2-40B4-BE49-F238E27FC236}">
-                <a16:creationId xmlns:a16="http://schemas.microsoft.com/office/drawing/2014/main" id="{6375DC7F-FBFB-40B1-9358-59577DFB994B}"/>
+                <a16:creationId xmlns:a16="http://schemas.microsoft.com/office/drawing/2014/main" id="{7F4ADE5A-984C-4EB3-BD3C-CB35C533AEA4}"/>
               </a:ext>
             </a:extLst>
           </p:cNvPr>
@@ -4748,7 +4887,7 @@
           <p:cNvPr id="12" name="next-test">
             <a:extLst xmlns:a="http://schemas.openxmlformats.org/drawingml/2006/main">
               <a:ext uri="{FF2B5EF4-FFF2-40B4-BE49-F238E27FC236}">
-                <a16:creationId xmlns:a16="http://schemas.microsoft.com/office/drawing/2014/main" id="{49D49DE2-1873-4202-9ABD-9250EDF5E9D8}"/>
+                <a16:creationId xmlns:a16="http://schemas.microsoft.com/office/drawing/2014/main" id="{110FA73C-A2DA-4D49-ABFA-26EE03096D27}"/>
               </a:ext>
             </a:extLst>
           </p:cNvPr>
@@ -4809,7 +4948,7 @@
           <p:cNvPr id="13" name="slide-number">
             <a:extLst xmlns:a="http://schemas.openxmlformats.org/drawingml/2006/main">
               <a:ext uri="{FF2B5EF4-FFF2-40B4-BE49-F238E27FC236}">
-                <a16:creationId xmlns:a16="http://schemas.microsoft.com/office/drawing/2014/main" id="{8595B823-7248-415E-A0AB-E58A11765FB3}"/>
+                <a16:creationId xmlns:a16="http://schemas.microsoft.com/office/drawing/2014/main" id="{495845F7-FCD9-4D60-9AB3-F3844EE78FC9}"/>
               </a:ext>
             </a:extLst>
           </p:cNvPr>
@@ -4868,7 +5007,7 @@
     </p:spTree>
     <p:extLst>
       <p:ext uri="{BB962C8B-B14F-4D97-AF65-F5344CB8AC3E}">
-        <p14:creationId xmlns:p14="http://schemas.microsoft.com/office/powerpoint/2010/main" val="41755675"/>
+        <p14:creationId xmlns:p14="http://schemas.microsoft.com/office/powerpoint/2010/main" val="1505696706"/>
       </p:ext>
     </p:extLst>
   </p:cSld>
@@ -4899,7 +5038,7 @@
           <p:cNvPr id="7" name="section-label">
             <a:extLst xmlns:a="http://schemas.openxmlformats.org/drawingml/2006/main">
               <a:ext uri="{FF2B5EF4-FFF2-40B4-BE49-F238E27FC236}">
-                <a16:creationId xmlns:a16="http://schemas.microsoft.com/office/drawing/2014/main" id="{C20A52E5-7386-4886-AC60-B6AC185EEAE8}"/>
+                <a16:creationId xmlns:a16="http://schemas.microsoft.com/office/drawing/2014/main" id="{69EC795E-A7C0-40AD-8D24-3B9B8F6E0D1B}"/>
               </a:ext>
             </a:extLst>
           </p:cNvPr>
@@ -4960,7 +5099,7 @@
           <p:cNvPr id="2" name="headline">
             <a:extLst xmlns:a="http://schemas.openxmlformats.org/drawingml/2006/main">
               <a:ext uri="{FF2B5EF4-FFF2-40B4-BE49-F238E27FC236}">
-                <a16:creationId xmlns:a16="http://schemas.microsoft.com/office/drawing/2014/main" id="{431970D9-E3E8-4127-87BE-01CFF3AC7D4D}"/>
+                <a16:creationId xmlns:a16="http://schemas.microsoft.com/office/drawing/2014/main" id="{1904BD8D-4BE4-4792-85D7-2B494F9A8CEC}"/>
               </a:ext>
             </a:extLst>
           </p:cNvPr>
@@ -5021,7 +5160,7 @@
           <p:cNvPr id="3" name="privacy-method">
             <a:extLst xmlns:a="http://schemas.openxmlformats.org/drawingml/2006/main">
               <a:ext uri="{FF2B5EF4-FFF2-40B4-BE49-F238E27FC236}">
-                <a16:creationId xmlns:a16="http://schemas.microsoft.com/office/drawing/2014/main" id="{0B4AAB3A-F23A-4A2D-9E66-DE0B1D360491}"/>
+                <a16:creationId xmlns:a16="http://schemas.microsoft.com/office/drawing/2014/main" id="{697D1535-6428-4B47-91CB-4DF22C9FAB89}"/>
               </a:ext>
             </a:extLst>
           </p:cNvPr>
@@ -5086,7 +5225,7 @@
           <p:nvPr/>
         </p:nvPicPr>
         <p:blipFill>
-          <a:blip xmlns:r="http://schemas.openxmlformats.org/officeDocument/2006/relationships" xmlns:a="http://schemas.openxmlformats.org/drawingml/2006/main" r:embed="R97e3d2d301e44973"/>
+          <a:blip xmlns:r="http://schemas.openxmlformats.org/officeDocument/2006/relationships" xmlns:a="http://schemas.openxmlformats.org/drawingml/2006/main" r:embed="R3094d3ffc0b049cb"/>
           <a:stretch xmlns:a="http://schemas.openxmlformats.org/drawingml/2006/main"/>
         </p:blipFill>
         <p:spPr>
@@ -5104,7 +5243,7 @@
           <p:cNvPr id="5" name="privacy-stage">
             <a:extLst xmlns:a="http://schemas.openxmlformats.org/drawingml/2006/main">
               <a:ext uri="{FF2B5EF4-FFF2-40B4-BE49-F238E27FC236}">
-                <a16:creationId xmlns:a16="http://schemas.microsoft.com/office/drawing/2014/main" id="{B53F46A5-5283-4BA1-9C68-2FD647AE8CCB}"/>
+                <a16:creationId xmlns:a16="http://schemas.microsoft.com/office/drawing/2014/main" id="{970D5527-73EC-44D6-A53D-E95EEFC3DA43}"/>
               </a:ext>
             </a:extLst>
           </p:cNvPr>
@@ -5165,7 +5304,7 @@
           <p:cNvPr id="6" name="slide-number">
             <a:extLst xmlns:a="http://schemas.openxmlformats.org/drawingml/2006/main">
               <a:ext uri="{FF2B5EF4-FFF2-40B4-BE49-F238E27FC236}">
-                <a16:creationId xmlns:a16="http://schemas.microsoft.com/office/drawing/2014/main" id="{54234B3F-06B1-4B25-8AE6-153EEB48EDDD}"/>
+                <a16:creationId xmlns:a16="http://schemas.microsoft.com/office/drawing/2014/main" id="{49582812-3525-413B-BC12-A058D1ADCEF2}"/>
               </a:ext>
             </a:extLst>
           </p:cNvPr>
@@ -5224,7 +5363,7 @@
     </p:spTree>
     <p:extLst>
       <p:ext uri="{BB962C8B-B14F-4D97-AF65-F5344CB8AC3E}">
-        <p14:creationId xmlns:p14="http://schemas.microsoft.com/office/powerpoint/2010/main" val="1819986585"/>
+        <p14:creationId xmlns:p14="http://schemas.microsoft.com/office/powerpoint/2010/main" val="702285833"/>
       </p:ext>
     </p:extLst>
   </p:cSld>
@@ -5255,7 +5394,7 @@
           <p:cNvPr id="8" name="section-label">
             <a:extLst xmlns:a="http://schemas.openxmlformats.org/drawingml/2006/main">
               <a:ext uri="{FF2B5EF4-FFF2-40B4-BE49-F238E27FC236}">
-                <a16:creationId xmlns:a16="http://schemas.microsoft.com/office/drawing/2014/main" id="{7066C7FB-2E3A-44CA-8E31-AB53E0DC8857}"/>
+                <a16:creationId xmlns:a16="http://schemas.microsoft.com/office/drawing/2014/main" id="{99056D66-07E8-4476-815F-69E0CC381C10}"/>
               </a:ext>
             </a:extLst>
           </p:cNvPr>
@@ -5316,7 +5455,7 @@
           <p:cNvPr id="2" name="headline">
             <a:extLst xmlns:a="http://schemas.openxmlformats.org/drawingml/2006/main">
               <a:ext uri="{FF2B5EF4-FFF2-40B4-BE49-F238E27FC236}">
-                <a16:creationId xmlns:a16="http://schemas.microsoft.com/office/drawing/2014/main" id="{E2EB662B-A429-435F-9481-CF4C1D09C7C4}"/>
+                <a16:creationId xmlns:a16="http://schemas.microsoft.com/office/drawing/2014/main" id="{B3D27262-79C8-447B-A88E-F7F45589933E}"/>
               </a:ext>
             </a:extLst>
           </p:cNvPr>
@@ -5377,7 +5516,7 @@
           <p:cNvPr id="3" name="privacy-decision">
             <a:extLst xmlns:a="http://schemas.openxmlformats.org/drawingml/2006/main">
               <a:ext uri="{FF2B5EF4-FFF2-40B4-BE49-F238E27FC236}">
-                <a16:creationId xmlns:a16="http://schemas.microsoft.com/office/drawing/2014/main" id="{4C194108-0FB7-488A-9A7C-5C3BA5A641A1}"/>
+                <a16:creationId xmlns:a16="http://schemas.microsoft.com/office/drawing/2014/main" id="{FFD65DFD-2C5F-4948-BF45-A96244465898}"/>
               </a:ext>
             </a:extLst>
           </p:cNvPr>
@@ -5438,7 +5577,7 @@
           <p:cNvPr id="4" name="theme-caption">
             <a:extLst xmlns:a="http://schemas.openxmlformats.org/drawingml/2006/main">
               <a:ext uri="{FF2B5EF4-FFF2-40B4-BE49-F238E27FC236}">
-                <a16:creationId xmlns:a16="http://schemas.microsoft.com/office/drawing/2014/main" id="{AD884713-D4DB-48E6-929D-CE0B8C169894}"/>
+                <a16:creationId xmlns:a16="http://schemas.microsoft.com/office/drawing/2014/main" id="{9C3CE2BF-6E05-4AE3-B44C-94F393097188}"/>
               </a:ext>
             </a:extLst>
           </p:cNvPr>
@@ -5503,7 +5642,7 @@
           <p:nvPr/>
         </p:nvPicPr>
         <p:blipFill>
-          <a:blip xmlns:r="http://schemas.openxmlformats.org/officeDocument/2006/relationships" xmlns:a="http://schemas.openxmlformats.org/drawingml/2006/main" r:embed="R3a9a604c061a4ac9"/>
+          <a:blip xmlns:r="http://schemas.openxmlformats.org/officeDocument/2006/relationships" xmlns:a="http://schemas.openxmlformats.org/drawingml/2006/main" r:embed="Rf653d6ea84c54727"/>
           <a:stretch xmlns:a="http://schemas.openxmlformats.org/drawingml/2006/main"/>
         </p:blipFill>
         <p:spPr>
@@ -5521,7 +5660,7 @@
           <p:cNvPr id="6" name="privacy-limits">
             <a:extLst xmlns:a="http://schemas.openxmlformats.org/drawingml/2006/main">
               <a:ext uri="{FF2B5EF4-FFF2-40B4-BE49-F238E27FC236}">
-                <a16:creationId xmlns:a16="http://schemas.microsoft.com/office/drawing/2014/main" id="{6A8F814D-77F4-4926-BA1A-47AA343D5D74}"/>
+                <a16:creationId xmlns:a16="http://schemas.microsoft.com/office/drawing/2014/main" id="{9349148C-1FE9-48B5-AD8A-B39FAE352E7D}"/>
               </a:ext>
             </a:extLst>
           </p:cNvPr>
@@ -5582,7 +5721,7 @@
           <p:cNvPr id="7" name="slide-number">
             <a:extLst xmlns:a="http://schemas.openxmlformats.org/drawingml/2006/main">
               <a:ext uri="{FF2B5EF4-FFF2-40B4-BE49-F238E27FC236}">
-                <a16:creationId xmlns:a16="http://schemas.microsoft.com/office/drawing/2014/main" id="{5A07109D-FF64-45D1-95AB-702A588D61AE}"/>
+                <a16:creationId xmlns:a16="http://schemas.microsoft.com/office/drawing/2014/main" id="{76AB3C1F-1934-4751-8A40-6285C035ED3B}"/>
               </a:ext>
             </a:extLst>
           </p:cNvPr>
@@ -5641,7 +5780,7 @@
     </p:spTree>
     <p:extLst>
       <p:ext uri="{BB962C8B-B14F-4D97-AF65-F5344CB8AC3E}">
-        <p14:creationId xmlns:p14="http://schemas.microsoft.com/office/powerpoint/2010/main" val="1410584179"/>
+        <p14:creationId xmlns:p14="http://schemas.microsoft.com/office/powerpoint/2010/main" val="1236340851"/>
       </p:ext>
     </p:extLst>
   </p:cSld>
@@ -5672,7 +5811,7 @@
           <p:cNvPr id="7" name="section-label">
             <a:extLst xmlns:a="http://schemas.openxmlformats.org/drawingml/2006/main">
               <a:ext uri="{FF2B5EF4-FFF2-40B4-BE49-F238E27FC236}">
-                <a16:creationId xmlns:a16="http://schemas.microsoft.com/office/drawing/2014/main" id="{DDEDB712-C568-4FF5-8DC6-A8B61419BEC3}"/>
+                <a16:creationId xmlns:a16="http://schemas.microsoft.com/office/drawing/2014/main" id="{EECF7501-3955-4E34-BF04-1A84E9389BF2}"/>
               </a:ext>
             </a:extLst>
           </p:cNvPr>
@@ -5733,7 +5872,7 @@
           <p:cNvPr id="2" name="headline">
             <a:extLst xmlns:a="http://schemas.openxmlformats.org/drawingml/2006/main">
               <a:ext uri="{FF2B5EF4-FFF2-40B4-BE49-F238E27FC236}">
-                <a16:creationId xmlns:a16="http://schemas.microsoft.com/office/drawing/2014/main" id="{E0BC1FFB-8E9B-4245-BE9F-FC78856EEFAA}"/>
+                <a16:creationId xmlns:a16="http://schemas.microsoft.com/office/drawing/2014/main" id="{DBBD43CF-17D6-45A5-8530-486BA9FC375F}"/>
               </a:ext>
             </a:extLst>
           </p:cNvPr>
@@ -5821,7 +5960,7 @@
           <p:cNvPr id="3" name="audit-role">
             <a:extLst xmlns:a="http://schemas.openxmlformats.org/drawingml/2006/main">
               <a:ext uri="{FF2B5EF4-FFF2-40B4-BE49-F238E27FC236}">
-                <a16:creationId xmlns:a16="http://schemas.microsoft.com/office/drawing/2014/main" id="{1E897A49-6506-4B7D-9A64-46EDE2AAB9EC}"/>
+                <a16:creationId xmlns:a16="http://schemas.microsoft.com/office/drawing/2014/main" id="{C4810460-FBEC-46A0-8E17-E972A27F8073}"/>
               </a:ext>
             </a:extLst>
           </p:cNvPr>
@@ -5882,7 +6021,7 @@
           <p:cNvPr id="4" name="audit-method">
             <a:extLst xmlns:a="http://schemas.openxmlformats.org/drawingml/2006/main">
               <a:ext uri="{FF2B5EF4-FFF2-40B4-BE49-F238E27FC236}">
-                <a16:creationId xmlns:a16="http://schemas.microsoft.com/office/drawing/2014/main" id="{31EF9155-82CD-4481-8E7E-DE5AF57879BE}"/>
+                <a16:creationId xmlns:a16="http://schemas.microsoft.com/office/drawing/2014/main" id="{0F79C69A-D286-42F7-90FD-E035D72D96BF}"/>
               </a:ext>
             </a:extLst>
           </p:cNvPr>
@@ -5947,7 +6086,7 @@
           <p:nvPr/>
         </p:nvPicPr>
         <p:blipFill>
-          <a:blip xmlns:r="http://schemas.openxmlformats.org/officeDocument/2006/relationships" xmlns:a="http://schemas.openxmlformats.org/drawingml/2006/main" r:embed="Ra804867551894142"/>
+          <a:blip xmlns:r="http://schemas.openxmlformats.org/officeDocument/2006/relationships" xmlns:a="http://schemas.openxmlformats.org/drawingml/2006/main" r:embed="R3228458e148d45b7"/>
           <a:stretch xmlns:a="http://schemas.openxmlformats.org/drawingml/2006/main"/>
         </p:blipFill>
         <p:spPr>
@@ -5965,7 +6104,7 @@
           <p:cNvPr id="6" name="slide-number">
             <a:extLst xmlns:a="http://schemas.openxmlformats.org/drawingml/2006/main">
               <a:ext uri="{FF2B5EF4-FFF2-40B4-BE49-F238E27FC236}">
-                <a16:creationId xmlns:a16="http://schemas.microsoft.com/office/drawing/2014/main" id="{EFB27994-DF59-43BF-A7D6-0B5EB9363FE7}"/>
+                <a16:creationId xmlns:a16="http://schemas.microsoft.com/office/drawing/2014/main" id="{AFF0E7AF-EC9A-4B56-88BE-B795D9441F9E}"/>
               </a:ext>
             </a:extLst>
           </p:cNvPr>
@@ -6024,7 +6163,7 @@
     </p:spTree>
     <p:extLst>
       <p:ext uri="{BB962C8B-B14F-4D97-AF65-F5344CB8AC3E}">
-        <p14:creationId xmlns:p14="http://schemas.microsoft.com/office/powerpoint/2010/main" val="1591002828"/>
+        <p14:creationId xmlns:p14="http://schemas.microsoft.com/office/powerpoint/2010/main" val="961828274"/>
       </p:ext>
     </p:extLst>
   </p:cSld>
@@ -6052,10 +6191,10 @@
       </p:grpSpPr>
       <p:sp>
         <p:nvSpPr>
-          <p:cNvPr id="12" name="section-label">
-            <a:extLst xmlns:a="http://schemas.openxmlformats.org/drawingml/2006/main">
-              <a:ext uri="{FF2B5EF4-FFF2-40B4-BE49-F238E27FC236}">
-                <a16:creationId xmlns:a16="http://schemas.microsoft.com/office/drawing/2014/main" id="{9050CD60-64DC-4529-9E60-D43D155D1771}"/>
+          <p:cNvPr id="13" name="section-label">
+            <a:extLst xmlns:a="http://schemas.openxmlformats.org/drawingml/2006/main">
+              <a:ext uri="{FF2B5EF4-FFF2-40B4-BE49-F238E27FC236}">
+                <a16:creationId xmlns:a16="http://schemas.microsoft.com/office/drawing/2014/main" id="{F0C095B8-5A3D-4CFC-ACAB-CE2A6219E1A8}"/>
               </a:ext>
             </a:extLst>
           </p:cNvPr>
@@ -6116,7 +6255,7 @@
           <p:cNvPr id="2" name="headline">
             <a:extLst xmlns:a="http://schemas.openxmlformats.org/drawingml/2006/main">
               <a:ext uri="{FF2B5EF4-FFF2-40B4-BE49-F238E27FC236}">
-                <a16:creationId xmlns:a16="http://schemas.microsoft.com/office/drawing/2014/main" id="{6062CD7F-3267-448D-9738-1D16EB72925F}"/>
+                <a16:creationId xmlns:a16="http://schemas.microsoft.com/office/drawing/2014/main" id="{69B695E7-EFC4-49EF-B1AB-E5615FC8B3EF}"/>
               </a:ext>
             </a:extLst>
           </p:cNvPr>
@@ -6128,28 +6267,28 @@
         <p:spPr>
           <a:xfrm xmlns:a="http://schemas.openxmlformats.org/drawingml/2006/main">
             <a:off x="609600" y="1104900"/>
-            <a:ext cx="5572125" cy="1381125"/>
-          </a:xfrm>
-          <a:prstGeom xmlns:a="http://schemas.openxmlformats.org/drawingml/2006/main" prst="rect">
-            <a:avLst/>
-          </a:prstGeom>
-          <a:noFill xmlns:a="http://schemas.openxmlformats.org/drawingml/2006/main"/>
-          <a:ln xmlns:a="http://schemas.openxmlformats.org/drawingml/2006/main" w="0">
-            <a:noFill/>
-          </a:ln>
-        </p:spPr>
-        <p:txBody>
-          <a:bodyPr xmlns:a="http://schemas.openxmlformats.org/drawingml/2006/main" wrap="square" lIns="0" tIns="0" rIns="0" bIns="0" anchor="t">
-            <a:noAutofit/>
-          </a:bodyPr>
-          <a:lstStyle xmlns:a="http://schemas.openxmlformats.org/drawingml/2006/main"/>
-          <a:p xmlns:a="http://schemas.openxmlformats.org/drawingml/2006/main">
-            <a:pPr>
-              <a:lnSpc>
-                <a:spcPct val="110000"/>
-              </a:lnSpc>
-              <a:buNone/>
-              <a:defRPr sz="3450" b="1">
+            <a:ext cx="10953750" cy="800100"/>
+          </a:xfrm>
+          <a:prstGeom xmlns:a="http://schemas.openxmlformats.org/drawingml/2006/main" prst="rect">
+            <a:avLst/>
+          </a:prstGeom>
+          <a:noFill xmlns:a="http://schemas.openxmlformats.org/drawingml/2006/main"/>
+          <a:ln xmlns:a="http://schemas.openxmlformats.org/drawingml/2006/main" w="0">
+            <a:noFill/>
+          </a:ln>
+        </p:spPr>
+        <p:txBody>
+          <a:bodyPr xmlns:a="http://schemas.openxmlformats.org/drawingml/2006/main" wrap="square" lIns="0" tIns="0" rIns="0" bIns="0" anchor="t">
+            <a:noAutofit/>
+          </a:bodyPr>
+          <a:lstStyle xmlns:a="http://schemas.openxmlformats.org/drawingml/2006/main"/>
+          <a:p xmlns:a="http://schemas.openxmlformats.org/drawingml/2006/main">
+            <a:pPr>
+              <a:lnSpc>
+                <a:spcPct val="110000"/>
+              </a:lnSpc>
+              <a:buNone/>
+              <a:defRPr sz="3525" b="1">
                 <a:solidFill>
                   <a:srgbClr val="192B25"/>
                 </a:solidFill>
@@ -6159,7 +6298,7 @@
               </a:defRPr>
             </a:pPr>
             <a:r>
-              <a:rPr sz="3450" b="1">
+              <a:rPr sz="3525" b="1">
                 <a:solidFill>
                   <a:srgbClr val="192B25"/>
                 </a:solidFill>
@@ -6167,16 +6306,172 @@
                 <a:ea typeface="Helvetica Neue"/>
                 <a:cs typeface="Helvetica Neue"/>
               </a:rPr>
-              <a:t>Recovery feedback</a:t>
-            </a:r>
-          </a:p>
-          <a:p xmlns:a="http://schemas.openxmlformats.org/drawingml/2006/main">
-            <a:pPr>
-              <a:lnSpc>
-                <a:spcPct val="110000"/>
-              </a:lnSpc>
-              <a:buNone/>
-              <a:defRPr sz="3450" b="1">
+              <a:t>Recovery feedback needed a clearer location</a:t>
+            </a:r>
+          </a:p>
+        </p:txBody>
+      </p:sp>
+      <p:sp>
+        <p:nvSpPr>
+          <p:cNvPr id="3" name="original-label">
+            <a:extLst xmlns:a="http://schemas.openxmlformats.org/drawingml/2006/main">
+              <a:ext uri="{FF2B5EF4-FFF2-40B4-BE49-F238E27FC236}">
+                <a16:creationId xmlns:a16="http://schemas.microsoft.com/office/drawing/2014/main" id="{7263EAE8-1197-4EF7-8CAA-A3FC375A1D92}"/>
+              </a:ext>
+            </a:extLst>
+          </p:cNvPr>
+          <p:cNvSpPr>
+            <a:spLocks xmlns:a="http://schemas.openxmlformats.org/drawingml/2006/main" noGrp="1"/>
+          </p:cNvSpPr>
+          <p:nvPr/>
+        </p:nvSpPr>
+        <p:spPr>
+          <a:xfrm xmlns:a="http://schemas.openxmlformats.org/drawingml/2006/main">
+            <a:off x="609600" y="2162175"/>
+            <a:ext cx="5048250" cy="266700"/>
+          </a:xfrm>
+          <a:prstGeom xmlns:a="http://schemas.openxmlformats.org/drawingml/2006/main" prst="rect">
+            <a:avLst/>
+          </a:prstGeom>
+          <a:noFill xmlns:a="http://schemas.openxmlformats.org/drawingml/2006/main"/>
+          <a:ln xmlns:a="http://schemas.openxmlformats.org/drawingml/2006/main" w="0">
+            <a:noFill/>
+          </a:ln>
+        </p:spPr>
+        <p:txBody>
+          <a:bodyPr xmlns:a="http://schemas.openxmlformats.org/drawingml/2006/main" wrap="square" lIns="0" tIns="0" rIns="0" bIns="0" anchor="t">
+            <a:noAutofit/>
+          </a:bodyPr>
+          <a:lstStyle xmlns:a="http://schemas.openxmlformats.org/drawingml/2006/main"/>
+          <a:p xmlns:a="http://schemas.openxmlformats.org/drawingml/2006/main">
+            <a:pPr>
+              <a:lnSpc>
+                <a:spcPct val="110000"/>
+              </a:lnSpc>
+              <a:buNone/>
+              <a:defRPr sz="1350" b="1">
+                <a:solidFill>
+                  <a:srgbClr val="244D3C"/>
+                </a:solidFill>
+                <a:latin typeface="Helvetica Neue"/>
+                <a:ea typeface="Helvetica Neue"/>
+                <a:cs typeface="Helvetica Neue"/>
+              </a:defRPr>
+            </a:pPr>
+            <a:r>
+              <a:rPr sz="1350" b="1">
+                <a:solidFill>
+                  <a:srgbClr val="244D3C"/>
+                </a:solidFill>
+                <a:latin typeface="Helvetica Neue"/>
+                <a:ea typeface="Helvetica Neue"/>
+                <a:cs typeface="Helvetica Neue"/>
+              </a:rPr>
+              <a:t>ORIGINAL</a:t>
+            </a:r>
+          </a:p>
+        </p:txBody>
+      </p:sp>
+      <p:sp>
+        <p:nvSpPr>
+          <p:cNvPr id="4" name="proposed-label">
+            <a:extLst xmlns:a="http://schemas.openxmlformats.org/drawingml/2006/main">
+              <a:ext uri="{FF2B5EF4-FFF2-40B4-BE49-F238E27FC236}">
+                <a16:creationId xmlns:a16="http://schemas.microsoft.com/office/drawing/2014/main" id="{65947715-479A-44F0-B9AD-DB5781FCF806}"/>
+              </a:ext>
+            </a:extLst>
+          </p:cNvPr>
+          <p:cNvSpPr>
+            <a:spLocks xmlns:a="http://schemas.openxmlformats.org/drawingml/2006/main" noGrp="1"/>
+          </p:cNvSpPr>
+          <p:nvPr/>
+        </p:nvSpPr>
+        <p:spPr>
+          <a:xfrm xmlns:a="http://schemas.openxmlformats.org/drawingml/2006/main">
+            <a:off x="6515100" y="2162175"/>
+            <a:ext cx="5048250" cy="266700"/>
+          </a:xfrm>
+          <a:prstGeom xmlns:a="http://schemas.openxmlformats.org/drawingml/2006/main" prst="rect">
+            <a:avLst/>
+          </a:prstGeom>
+          <a:noFill xmlns:a="http://schemas.openxmlformats.org/drawingml/2006/main"/>
+          <a:ln xmlns:a="http://schemas.openxmlformats.org/drawingml/2006/main" w="0">
+            <a:noFill/>
+          </a:ln>
+        </p:spPr>
+        <p:txBody>
+          <a:bodyPr xmlns:a="http://schemas.openxmlformats.org/drawingml/2006/main" wrap="square" lIns="0" tIns="0" rIns="0" bIns="0" anchor="t">
+            <a:noAutofit/>
+          </a:bodyPr>
+          <a:lstStyle xmlns:a="http://schemas.openxmlformats.org/drawingml/2006/main"/>
+          <a:p xmlns:a="http://schemas.openxmlformats.org/drawingml/2006/main">
+            <a:pPr>
+              <a:lnSpc>
+                <a:spcPct val="110000"/>
+              </a:lnSpc>
+              <a:buNone/>
+              <a:defRPr sz="1350" b="1">
+                <a:solidFill>
+                  <a:srgbClr val="244D3C"/>
+                </a:solidFill>
+                <a:latin typeface="Helvetica Neue"/>
+                <a:ea typeface="Helvetica Neue"/>
+                <a:cs typeface="Helvetica Neue"/>
+              </a:defRPr>
+            </a:pPr>
+            <a:r>
+              <a:rPr sz="1350" b="1">
+                <a:solidFill>
+                  <a:srgbClr val="244D3C"/>
+                </a:solidFill>
+                <a:latin typeface="Helvetica Neue"/>
+                <a:ea typeface="Helvetica Neue"/>
+                <a:cs typeface="Helvetica Neue"/>
+              </a:rPr>
+              <a:t>MY RECOMMENDATION</a:t>
+            </a:r>
+          </a:p>
+        </p:txBody>
+      </p:sp>
+      <p:sp>
+        <p:nvSpPr>
+          <p:cNvPr id="5" name="error-observation">
+            <a:extLst xmlns:a="http://schemas.openxmlformats.org/drawingml/2006/main">
+              <a:ext uri="{FF2B5EF4-FFF2-40B4-BE49-F238E27FC236}">
+                <a16:creationId xmlns:a16="http://schemas.microsoft.com/office/drawing/2014/main" id="{8695143F-8464-4D7A-BFC2-0EABBAF36FC7}"/>
+              </a:ext>
+            </a:extLst>
+          </p:cNvPr>
+          <p:cNvSpPr>
+            <a:spLocks xmlns:a="http://schemas.openxmlformats.org/drawingml/2006/main" noGrp="1"/>
+          </p:cNvSpPr>
+          <p:nvPr/>
+        </p:nvSpPr>
+        <p:spPr>
+          <a:xfrm xmlns:a="http://schemas.openxmlformats.org/drawingml/2006/main">
+            <a:off x="609600" y="2562225"/>
+            <a:ext cx="5048250" cy="400050"/>
+          </a:xfrm>
+          <a:prstGeom xmlns:a="http://schemas.openxmlformats.org/drawingml/2006/main" prst="rect">
+            <a:avLst/>
+          </a:prstGeom>
+          <a:noFill xmlns:a="http://schemas.openxmlformats.org/drawingml/2006/main"/>
+          <a:ln xmlns:a="http://schemas.openxmlformats.org/drawingml/2006/main" w="0">
+            <a:noFill/>
+          </a:ln>
+        </p:spPr>
+        <p:txBody>
+          <a:bodyPr xmlns:a="http://schemas.openxmlformats.org/drawingml/2006/main" wrap="square" lIns="0" tIns="0" rIns="0" bIns="0" anchor="t">
+            <a:noAutofit/>
+          </a:bodyPr>
+          <a:lstStyle xmlns:a="http://schemas.openxmlformats.org/drawingml/2006/main"/>
+          <a:p xmlns:a="http://schemas.openxmlformats.org/drawingml/2006/main">
+            <a:pPr>
+              <a:lnSpc>
+                <a:spcPct val="110000"/>
+              </a:lnSpc>
+              <a:buNone/>
+              <a:defRPr sz="1725" b="0">
                 <a:solidFill>
                   <a:srgbClr val="192B25"/>
                 </a:solidFill>
@@ -6186,7 +6481,7 @@
               </a:defRPr>
             </a:pPr>
             <a:r>
-              <a:rPr sz="3450" b="1">
+              <a:rPr sz="1725" b="0">
                 <a:solidFill>
                   <a:srgbClr val="192B25"/>
                 </a:solidFill>
@@ -6194,50 +6489,50 @@
                 <a:ea typeface="Helvetica Neue"/>
                 <a:cs typeface="Helvetica Neue"/>
               </a:rPr>
-              <a:t>needed a clearer location</a:t>
-            </a:r>
-          </a:p>
-        </p:txBody>
-      </p:sp>
-      <p:sp>
-        <p:nvSpPr>
-          <p:cNvPr id="3" name="error-observation">
-            <a:extLst xmlns:a="http://schemas.openxmlformats.org/drawingml/2006/main">
-              <a:ext uri="{FF2B5EF4-FFF2-40B4-BE49-F238E27FC236}">
-                <a16:creationId xmlns:a16="http://schemas.microsoft.com/office/drawing/2014/main" id="{2A4C5D9B-A237-4153-BAE8-5D90521B0431}"/>
-              </a:ext>
-            </a:extLst>
-          </p:cNvPr>
-          <p:cNvSpPr>
-            <a:spLocks xmlns:a="http://schemas.openxmlformats.org/drawingml/2006/main" noGrp="1"/>
-          </p:cNvSpPr>
-          <p:nvPr/>
-        </p:nvSpPr>
-        <p:spPr>
-          <a:xfrm xmlns:a="http://schemas.openxmlformats.org/drawingml/2006/main">
-            <a:off x="609600" y="3105150"/>
-            <a:ext cx="3400425" cy="1219200"/>
-          </a:xfrm>
-          <a:prstGeom xmlns:a="http://schemas.openxmlformats.org/drawingml/2006/main" prst="rect">
-            <a:avLst/>
-          </a:prstGeom>
-          <a:noFill xmlns:a="http://schemas.openxmlformats.org/drawingml/2006/main"/>
-          <a:ln xmlns:a="http://schemas.openxmlformats.org/drawingml/2006/main" w="0">
-            <a:noFill/>
-          </a:ln>
-        </p:spPr>
-        <p:txBody>
-          <a:bodyPr xmlns:a="http://schemas.openxmlformats.org/drawingml/2006/main" wrap="square" lIns="0" tIns="0" rIns="0" bIns="0" anchor="t">
-            <a:noAutofit/>
-          </a:bodyPr>
-          <a:lstStyle xmlns:a="http://schemas.openxmlformats.org/drawingml/2006/main"/>
-          <a:p xmlns:a="http://schemas.openxmlformats.org/drawingml/2006/main">
-            <a:pPr>
-              <a:lnSpc>
-                <a:spcPct val="110000"/>
-              </a:lnSpc>
-              <a:buNone/>
-              <a:defRPr sz="2025" b="0">
+              <a:t>The error sat away from the login fields.</a:t>
+            </a:r>
+          </a:p>
+        </p:txBody>
+      </p:sp>
+      <p:sp>
+        <p:nvSpPr>
+          <p:cNvPr id="6" name="error-recommendation">
+            <a:extLst xmlns:a="http://schemas.openxmlformats.org/drawingml/2006/main">
+              <a:ext uri="{FF2B5EF4-FFF2-40B4-BE49-F238E27FC236}">
+                <a16:creationId xmlns:a16="http://schemas.microsoft.com/office/drawing/2014/main" id="{A42BCB5E-5ACB-43DE-B508-AC646ED400F2}"/>
+              </a:ext>
+            </a:extLst>
+          </p:cNvPr>
+          <p:cNvSpPr>
+            <a:spLocks xmlns:a="http://schemas.openxmlformats.org/drawingml/2006/main" noGrp="1"/>
+          </p:cNvSpPr>
+          <p:nvPr/>
+        </p:nvSpPr>
+        <p:spPr>
+          <a:xfrm xmlns:a="http://schemas.openxmlformats.org/drawingml/2006/main">
+            <a:off x="6515100" y="2562225"/>
+            <a:ext cx="5048250" cy="400050"/>
+          </a:xfrm>
+          <a:prstGeom xmlns:a="http://schemas.openxmlformats.org/drawingml/2006/main" prst="rect">
+            <a:avLst/>
+          </a:prstGeom>
+          <a:noFill xmlns:a="http://schemas.openxmlformats.org/drawingml/2006/main"/>
+          <a:ln xmlns:a="http://schemas.openxmlformats.org/drawingml/2006/main" w="0">
+            <a:noFill/>
+          </a:ln>
+        </p:spPr>
+        <p:txBody>
+          <a:bodyPr xmlns:a="http://schemas.openxmlformats.org/drawingml/2006/main" wrap="square" lIns="0" tIns="0" rIns="0" bIns="0" anchor="t">
+            <a:noAutofit/>
+          </a:bodyPr>
+          <a:lstStyle xmlns:a="http://schemas.openxmlformats.org/drawingml/2006/main"/>
+          <a:p xmlns:a="http://schemas.openxmlformats.org/drawingml/2006/main">
+            <a:pPr>
+              <a:lnSpc>
+                <a:spcPct val="110000"/>
+              </a:lnSpc>
+              <a:buNone/>
+              <a:defRPr sz="1725" b="0">
                 <a:solidFill>
                   <a:srgbClr val="192B25"/>
                 </a:solidFill>
@@ -6247,7 +6542,7 @@
               </a:defRPr>
             </a:pPr>
             <a:r>
-              <a:rPr sz="2025" b="0">
+              <a:rPr sz="1725" b="0">
                 <a:solidFill>
                   <a:srgbClr val="192B25"/>
                 </a:solidFill>
@@ -6255,216 +6550,11 @@
                 <a:ea typeface="Helvetica Neue"/>
                 <a:cs typeface="Helvetica Neue"/>
               </a:rPr>
-              <a:t>The existing error appeared at the page footer, away from the login fields.</a:t>
-            </a:r>
-          </a:p>
-        </p:txBody>
-      </p:sp>
-      <p:sp>
-        <p:nvSpPr>
-          <p:cNvPr id="4" name="error-recommendation">
-            <a:extLst xmlns:a="http://schemas.openxmlformats.org/drawingml/2006/main">
-              <a:ext uri="{FF2B5EF4-FFF2-40B4-BE49-F238E27FC236}">
-                <a16:creationId xmlns:a16="http://schemas.microsoft.com/office/drawing/2014/main" id="{8B18A973-027C-4F66-BDB6-25038774E789}"/>
-              </a:ext>
-            </a:extLst>
-          </p:cNvPr>
-          <p:cNvSpPr>
-            <a:spLocks xmlns:a="http://schemas.openxmlformats.org/drawingml/2006/main" noGrp="1"/>
-          </p:cNvSpPr>
-          <p:nvPr/>
-        </p:nvSpPr>
-        <p:spPr>
-          <a:xfrm xmlns:a="http://schemas.openxmlformats.org/drawingml/2006/main">
-            <a:off x="609600" y="4819650"/>
-            <a:ext cx="3400425" cy="1200150"/>
-          </a:xfrm>
-          <a:prstGeom xmlns:a="http://schemas.openxmlformats.org/drawingml/2006/main" prst="rect">
-            <a:avLst/>
-          </a:prstGeom>
-          <a:noFill xmlns:a="http://schemas.openxmlformats.org/drawingml/2006/main"/>
-          <a:ln xmlns:a="http://schemas.openxmlformats.org/drawingml/2006/main" w="0">
-            <a:noFill/>
-          </a:ln>
-        </p:spPr>
-        <p:txBody>
-          <a:bodyPr xmlns:a="http://schemas.openxmlformats.org/drawingml/2006/main" wrap="square" lIns="0" tIns="0" rIns="0" bIns="0" anchor="t">
-            <a:noAutofit/>
-          </a:bodyPr>
-          <a:lstStyle xmlns:a="http://schemas.openxmlformats.org/drawingml/2006/main"/>
-          <a:p xmlns:a="http://schemas.openxmlformats.org/drawingml/2006/main">
-            <a:pPr>
-              <a:lnSpc>
-                <a:spcPct val="110000"/>
-              </a:lnSpc>
-              <a:buNone/>
-              <a:defRPr sz="1800" b="1">
-                <a:solidFill>
-                  <a:srgbClr val="244D3C"/>
-                </a:solidFill>
-                <a:latin typeface="Helvetica Neue"/>
-                <a:ea typeface="Helvetica Neue"/>
-                <a:cs typeface="Helvetica Neue"/>
-              </a:defRPr>
-            </a:pPr>
-            <a:r>
-              <a:rPr sz="1800" b="1">
-                <a:solidFill>
-                  <a:srgbClr val="244D3C"/>
-                </a:solidFill>
-                <a:latin typeface="Helvetica Neue"/>
-                <a:ea typeface="Helvetica Neue"/>
-                <a:cs typeface="Helvetica Neue"/>
-              </a:rPr>
-              <a:t>I recommended placing the correction beside the field where someone could act.</a:t>
-            </a:r>
-          </a:p>
-        </p:txBody>
-      </p:sp>
-      <p:sp>
-        <p:nvSpPr>
-          <p:cNvPr id="5" name="original-label">
-            <a:extLst xmlns:a="http://schemas.openxmlformats.org/drawingml/2006/main">
-              <a:ext uri="{FF2B5EF4-FFF2-40B4-BE49-F238E27FC236}">
-                <a16:creationId xmlns:a16="http://schemas.microsoft.com/office/drawing/2014/main" id="{D0D78620-68A3-41EB-BF20-BD9D5A649986}"/>
-              </a:ext>
-            </a:extLst>
-          </p:cNvPr>
-          <p:cNvSpPr>
-            <a:spLocks xmlns:a="http://schemas.openxmlformats.org/drawingml/2006/main" noGrp="1"/>
-          </p:cNvSpPr>
-          <p:nvPr/>
-        </p:nvSpPr>
-        <p:spPr>
-          <a:xfrm xmlns:a="http://schemas.openxmlformats.org/drawingml/2006/main">
-            <a:off x="4419600" y="2609850"/>
-            <a:ext cx="3257550" cy="257175"/>
-          </a:xfrm>
-          <a:prstGeom xmlns:a="http://schemas.openxmlformats.org/drawingml/2006/main" prst="rect">
-            <a:avLst/>
-          </a:prstGeom>
-          <a:noFill xmlns:a="http://schemas.openxmlformats.org/drawingml/2006/main"/>
-          <a:ln xmlns:a="http://schemas.openxmlformats.org/drawingml/2006/main" w="0">
-            <a:noFill/>
-          </a:ln>
-        </p:spPr>
-        <p:txBody>
-          <a:bodyPr xmlns:a="http://schemas.openxmlformats.org/drawingml/2006/main" wrap="square" lIns="0" tIns="0" rIns="0" bIns="0" anchor="t">
-            <a:noAutofit/>
-          </a:bodyPr>
-          <a:lstStyle xmlns:a="http://schemas.openxmlformats.org/drawingml/2006/main"/>
-          <a:p xmlns:a="http://schemas.openxmlformats.org/drawingml/2006/main">
-            <a:pPr>
-              <a:lnSpc>
-                <a:spcPct val="110000"/>
-              </a:lnSpc>
-              <a:buNone/>
-              <a:defRPr sz="1350" b="1">
-                <a:solidFill>
-                  <a:srgbClr val="244D3C"/>
-                </a:solidFill>
-                <a:latin typeface="Helvetica Neue"/>
-                <a:ea typeface="Helvetica Neue"/>
-                <a:cs typeface="Helvetica Neue"/>
-              </a:defRPr>
-            </a:pPr>
-            <a:r>
-              <a:rPr sz="1350" b="1">
-                <a:solidFill>
-                  <a:srgbClr val="244D3C"/>
-                </a:solidFill>
-                <a:latin typeface="Helvetica Neue"/>
-                <a:ea typeface="Helvetica Neue"/>
-                <a:cs typeface="Helvetica Neue"/>
-              </a:rPr>
-              <a:t>Original</a:t>
-            </a:r>
-          </a:p>
-        </p:txBody>
-      </p:sp>
-      <p:sp>
-        <p:nvSpPr>
-          <p:cNvPr id="6" name="proposed-label">
-            <a:extLst xmlns:a="http://schemas.openxmlformats.org/drawingml/2006/main">
-              <a:ext uri="{FF2B5EF4-FFF2-40B4-BE49-F238E27FC236}">
-                <a16:creationId xmlns:a16="http://schemas.microsoft.com/office/drawing/2014/main" id="{0565994B-B9EE-44B6-A716-002F52505D0C}"/>
-              </a:ext>
-            </a:extLst>
-          </p:cNvPr>
-          <p:cNvSpPr>
-            <a:spLocks xmlns:a="http://schemas.openxmlformats.org/drawingml/2006/main" noGrp="1"/>
-          </p:cNvSpPr>
-          <p:nvPr/>
-        </p:nvSpPr>
-        <p:spPr>
-          <a:xfrm xmlns:a="http://schemas.openxmlformats.org/drawingml/2006/main">
-            <a:off x="8086725" y="2609850"/>
-            <a:ext cx="3257550" cy="257175"/>
-          </a:xfrm>
-          <a:prstGeom xmlns:a="http://schemas.openxmlformats.org/drawingml/2006/main" prst="rect">
-            <a:avLst/>
-          </a:prstGeom>
-          <a:noFill xmlns:a="http://schemas.openxmlformats.org/drawingml/2006/main"/>
-          <a:ln xmlns:a="http://schemas.openxmlformats.org/drawingml/2006/main" w="0">
-            <a:noFill/>
-          </a:ln>
-        </p:spPr>
-        <p:txBody>
-          <a:bodyPr xmlns:a="http://schemas.openxmlformats.org/drawingml/2006/main" wrap="square" lIns="0" tIns="0" rIns="0" bIns="0" anchor="t">
-            <a:noAutofit/>
-          </a:bodyPr>
-          <a:lstStyle xmlns:a="http://schemas.openxmlformats.org/drawingml/2006/main"/>
-          <a:p xmlns:a="http://schemas.openxmlformats.org/drawingml/2006/main">
-            <a:pPr>
-              <a:lnSpc>
-                <a:spcPct val="110000"/>
-              </a:lnSpc>
-              <a:buNone/>
-              <a:defRPr sz="1350" b="1">
-                <a:solidFill>
-                  <a:srgbClr val="244D3C"/>
-                </a:solidFill>
-                <a:latin typeface="Helvetica Neue"/>
-                <a:ea typeface="Helvetica Neue"/>
-                <a:cs typeface="Helvetica Neue"/>
-              </a:defRPr>
-            </a:pPr>
-            <a:r>
-              <a:rPr sz="1350" b="1">
-                <a:solidFill>
-                  <a:srgbClr val="244D3C"/>
-                </a:solidFill>
-                <a:latin typeface="Helvetica Neue"/>
-                <a:ea typeface="Helvetica Neue"/>
-                <a:cs typeface="Helvetica Neue"/>
-              </a:rPr>
-              <a:t>Proposed</a:t>
-            </a:r>
-          </a:p>
-        </p:txBody>
-      </p:sp>
-      <p:pic>
-        <p:nvPicPr>
-          <p:cNvPr id="18" name=""/>
-          <p:cNvPicPr>
-            <a:picLocks xmlns:a="http://schemas.openxmlformats.org/drawingml/2006/main" noChangeAspect="1"/>
-          </p:cNvPicPr>
-          <p:nvPr/>
-        </p:nvPicPr>
-        <p:blipFill>
-          <a:blip xmlns:r="http://schemas.openxmlformats.org/officeDocument/2006/relationships" xmlns:a="http://schemas.openxmlformats.org/drawingml/2006/main" r:embed="Rf8944c9cd9294c54"/>
-          <a:stretch xmlns:a="http://schemas.openxmlformats.org/drawingml/2006/main"/>
-        </p:blipFill>
-        <p:spPr>
-          <a:xfrm xmlns:a="http://schemas.openxmlformats.org/drawingml/2006/main">
-            <a:off x="4419600" y="3079091"/>
-            <a:ext cx="3257550" cy="2642918"/>
-          </a:xfrm>
-          <a:prstGeom xmlns:a="http://schemas.openxmlformats.org/drawingml/2006/main" prst="rect">
-            <a:avLst/>
-          </a:prstGeom>
-        </p:spPr>
-      </p:pic>
+              <a:t>Place the correction beside the field.</a:t>
+            </a:r>
+          </a:p>
+        </p:txBody>
+      </p:sp>
       <p:pic>
         <p:nvPicPr>
           <p:cNvPr id="19" name=""/>
@@ -6474,96 +6564,35 @@
           <p:nvPr/>
         </p:nvPicPr>
         <p:blipFill>
-          <a:blip xmlns:r="http://schemas.openxmlformats.org/officeDocument/2006/relationships" xmlns:a="http://schemas.openxmlformats.org/drawingml/2006/main" r:embed="Rec34337112ef4c4b"/>
+          <a:blip xmlns:r="http://schemas.openxmlformats.org/officeDocument/2006/relationships" xmlns:a="http://schemas.openxmlformats.org/drawingml/2006/main" r:embed="Rd071569ca57b4d20"/>
           <a:stretch xmlns:a="http://schemas.openxmlformats.org/drawingml/2006/main"/>
         </p:blipFill>
         <p:spPr>
           <a:xfrm xmlns:a="http://schemas.openxmlformats.org/drawingml/2006/main">
-            <a:off x="8086725" y="3233261"/>
-            <a:ext cx="3257550" cy="2334578"/>
+            <a:off x="1366838" y="3067050"/>
+            <a:ext cx="3533775" cy="2867025"/>
           </a:xfrm>
           <a:prstGeom xmlns:a="http://schemas.openxmlformats.org/drawingml/2006/main" prst="rect">
             <a:avLst/>
           </a:prstGeom>
         </p:spPr>
       </p:pic>
-      <p:sp>
-        <p:nvSpPr>
-          <p:cNvPr id="9" name="footer-label">
-            <a:extLst xmlns:a="http://schemas.openxmlformats.org/drawingml/2006/main">
-              <a:ext uri="{FF2B5EF4-FFF2-40B4-BE49-F238E27FC236}">
-                <a16:creationId xmlns:a16="http://schemas.microsoft.com/office/drawing/2014/main" id="{300DA12A-A8B6-454D-A319-8283B6981806}"/>
-              </a:ext>
-            </a:extLst>
-          </p:cNvPr>
-          <p:cNvSpPr>
-            <a:spLocks xmlns:a="http://schemas.openxmlformats.org/drawingml/2006/main" noGrp="1"/>
-          </p:cNvSpPr>
-          <p:nvPr/>
-        </p:nvSpPr>
-        <p:spPr>
-          <a:xfrm xmlns:a="http://schemas.openxmlformats.org/drawingml/2006/main">
-            <a:off x="4419600" y="5876925"/>
-            <a:ext cx="3257550" cy="247650"/>
-          </a:xfrm>
-          <a:prstGeom xmlns:a="http://schemas.openxmlformats.org/drawingml/2006/main" prst="rect">
-            <a:avLst/>
-          </a:prstGeom>
-          <a:noFill xmlns:a="http://schemas.openxmlformats.org/drawingml/2006/main"/>
-          <a:ln xmlns:a="http://schemas.openxmlformats.org/drawingml/2006/main" w="0">
-            <a:noFill/>
-          </a:ln>
-        </p:spPr>
-        <p:txBody>
-          <a:bodyPr xmlns:a="http://schemas.openxmlformats.org/drawingml/2006/main" wrap="square" lIns="0" tIns="0" rIns="0" bIns="0" anchor="t">
-            <a:noAutofit/>
-          </a:bodyPr>
-          <a:lstStyle xmlns:a="http://schemas.openxmlformats.org/drawingml/2006/main"/>
-          <a:p xmlns:a="http://schemas.openxmlformats.org/drawingml/2006/main">
-            <a:pPr>
-              <a:lnSpc>
-                <a:spcPct val="110000"/>
-              </a:lnSpc>
-              <a:buNone/>
-              <a:defRPr sz="1200" b="0">
-                <a:solidFill>
-                  <a:srgbClr val="58645D"/>
-                </a:solidFill>
-                <a:latin typeface="Helvetica Neue"/>
-                <a:ea typeface="Helvetica Neue"/>
-                <a:cs typeface="Helvetica Neue"/>
-              </a:defRPr>
-            </a:pPr>
-            <a:r>
-              <a:rPr sz="1200" b="0">
-                <a:solidFill>
-                  <a:srgbClr val="58645D"/>
-                </a:solidFill>
-                <a:latin typeface="Helvetica Neue"/>
-                <a:ea typeface="Helvetica Neue"/>
-                <a:cs typeface="Helvetica Neue"/>
-              </a:rPr>
-              <a:t>Original page-footer error</a:t>
-            </a:r>
-          </a:p>
-        </p:txBody>
-      </p:sp>
       <p:pic>
         <p:nvPicPr>
-          <p:cNvPr id="21" name=""/>
+          <p:cNvPr id="20" name=""/>
           <p:cNvPicPr>
             <a:picLocks xmlns:a="http://schemas.openxmlformats.org/drawingml/2006/main" noChangeAspect="1"/>
           </p:cNvPicPr>
           <p:nvPr/>
         </p:nvPicPr>
         <p:blipFill>
-          <a:blip xmlns:r="http://schemas.openxmlformats.org/officeDocument/2006/relationships" xmlns:a="http://schemas.openxmlformats.org/drawingml/2006/main" r:embed="R572c6f4ed71d448b"/>
+          <a:blip xmlns:r="http://schemas.openxmlformats.org/officeDocument/2006/relationships" xmlns:a="http://schemas.openxmlformats.org/drawingml/2006/main" r:embed="Rb8afaa3b9281466a"/>
           <a:stretch xmlns:a="http://schemas.openxmlformats.org/drawingml/2006/main"/>
         </p:blipFill>
         <p:spPr>
           <a:xfrm xmlns:a="http://schemas.openxmlformats.org/drawingml/2006/main">
-            <a:off x="4419600" y="6182704"/>
-            <a:ext cx="3257550" cy="312368"/>
+            <a:off x="7038975" y="3067050"/>
+            <a:ext cx="4000500" cy="2867025"/>
           </a:xfrm>
           <a:prstGeom xmlns:a="http://schemas.openxmlformats.org/drawingml/2006/main" prst="rect">
             <a:avLst/>
@@ -6572,10 +6601,181 @@
       </p:pic>
       <p:sp>
         <p:nvSpPr>
-          <p:cNvPr id="11" name="slide-number">
-            <a:extLst xmlns:a="http://schemas.openxmlformats.org/drawingml/2006/main">
-              <a:ext uri="{FF2B5EF4-FFF2-40B4-BE49-F238E27FC236}">
-                <a16:creationId xmlns:a16="http://schemas.microsoft.com/office/drawing/2014/main" id="{BC572D53-DAA5-4DA0-8FD0-27F8F5FCD813}"/>
+          <p:cNvPr id="9" name="footer-label">
+            <a:extLst xmlns:a="http://schemas.openxmlformats.org/drawingml/2006/main">
+              <a:ext uri="{FF2B5EF4-FFF2-40B4-BE49-F238E27FC236}">
+                <a16:creationId xmlns:a16="http://schemas.microsoft.com/office/drawing/2014/main" id="{0E4F790E-B090-4B6D-97D4-B5BE4AE1A662}"/>
+              </a:ext>
+            </a:extLst>
+          </p:cNvPr>
+          <p:cNvSpPr>
+            <a:spLocks xmlns:a="http://schemas.openxmlformats.org/drawingml/2006/main" noGrp="1"/>
+          </p:cNvSpPr>
+          <p:nvPr/>
+        </p:nvSpPr>
+        <p:spPr>
+          <a:xfrm xmlns:a="http://schemas.openxmlformats.org/drawingml/2006/main">
+            <a:off x="609600" y="6076950"/>
+            <a:ext cx="5048250" cy="228600"/>
+          </a:xfrm>
+          <a:prstGeom xmlns:a="http://schemas.openxmlformats.org/drawingml/2006/main" prst="rect">
+            <a:avLst/>
+          </a:prstGeom>
+          <a:noFill xmlns:a="http://schemas.openxmlformats.org/drawingml/2006/main"/>
+          <a:ln xmlns:a="http://schemas.openxmlformats.org/drawingml/2006/main" w="0">
+            <a:noFill/>
+          </a:ln>
+        </p:spPr>
+        <p:txBody>
+          <a:bodyPr xmlns:a="http://schemas.openxmlformats.org/drawingml/2006/main" wrap="square" lIns="0" tIns="0" rIns="0" bIns="0" anchor="t">
+            <a:noAutofit/>
+          </a:bodyPr>
+          <a:lstStyle xmlns:a="http://schemas.openxmlformats.org/drawingml/2006/main"/>
+          <a:p xmlns:a="http://schemas.openxmlformats.org/drawingml/2006/main">
+            <a:pPr>
+              <a:lnSpc>
+                <a:spcPct val="110000"/>
+              </a:lnSpc>
+              <a:buNone/>
+              <a:defRPr sz="1200" b="0">
+                <a:solidFill>
+                  <a:srgbClr val="58645D"/>
+                </a:solidFill>
+                <a:latin typeface="Helvetica Neue"/>
+                <a:ea typeface="Helvetica Neue"/>
+                <a:cs typeface="Helvetica Neue"/>
+              </a:defRPr>
+            </a:pPr>
+            <a:r>
+              <a:rPr sz="1200" b="0">
+                <a:solidFill>
+                  <a:srgbClr val="58645D"/>
+                </a:solidFill>
+                <a:latin typeface="Helvetica Neue"/>
+                <a:ea typeface="Helvetica Neue"/>
+                <a:cs typeface="Helvetica Neue"/>
+              </a:rPr>
+              <a:t>Separate page-footer message:</a:t>
+            </a:r>
+          </a:p>
+        </p:txBody>
+      </p:sp>
+      <p:pic>
+        <p:nvPicPr>
+          <p:cNvPr id="22" name=""/>
+          <p:cNvPicPr>
+            <a:picLocks xmlns:a="http://schemas.openxmlformats.org/drawingml/2006/main" noChangeAspect="1"/>
+          </p:cNvPicPr>
+          <p:nvPr/>
+        </p:nvPicPr>
+        <p:blipFill>
+          <a:blip xmlns:r="http://schemas.openxmlformats.org/officeDocument/2006/relationships" xmlns:a="http://schemas.openxmlformats.org/drawingml/2006/main" r:embed="Rfd349e32083845bd"/>
+          <a:stretch xmlns:a="http://schemas.openxmlformats.org/drawingml/2006/main"/>
+        </p:blipFill>
+        <p:spPr>
+          <a:xfrm xmlns:a="http://schemas.openxmlformats.org/drawingml/2006/main">
+            <a:off x="609600" y="6372225"/>
+            <a:ext cx="3476625" cy="333375"/>
+          </a:xfrm>
+          <a:prstGeom xmlns:a="http://schemas.openxmlformats.org/drawingml/2006/main" prst="rect">
+            <a:avLst/>
+          </a:prstGeom>
+        </p:spPr>
+      </p:pic>
+      <p:sp>
+        <p:nvSpPr>
+          <p:cNvPr id="11" name="recommendation-status">
+            <a:extLst xmlns:a="http://schemas.openxmlformats.org/drawingml/2006/main">
+              <a:ext uri="{FF2B5EF4-FFF2-40B4-BE49-F238E27FC236}">
+                <a16:creationId xmlns:a16="http://schemas.microsoft.com/office/drawing/2014/main" id="{2DB7F075-3935-4220-BAFE-8F3E810EFA45}"/>
+              </a:ext>
+            </a:extLst>
+          </p:cNvPr>
+          <p:cNvSpPr>
+            <a:spLocks xmlns:a="http://schemas.openxmlformats.org/drawingml/2006/main" noGrp="1"/>
+          </p:cNvSpPr>
+          <p:nvPr/>
+        </p:nvSpPr>
+        <p:spPr>
+          <a:xfrm xmlns:a="http://schemas.openxmlformats.org/drawingml/2006/main">
+            <a:off x="6515100" y="6115050"/>
+            <a:ext cx="4686300" cy="542925"/>
+          </a:xfrm>
+          <a:prstGeom xmlns:a="http://schemas.openxmlformats.org/drawingml/2006/main" prst="rect">
+            <a:avLst/>
+          </a:prstGeom>
+          <a:noFill xmlns:a="http://schemas.openxmlformats.org/drawingml/2006/main"/>
+          <a:ln xmlns:a="http://schemas.openxmlformats.org/drawingml/2006/main" w="0">
+            <a:noFill/>
+          </a:ln>
+        </p:spPr>
+        <p:txBody>
+          <a:bodyPr xmlns:a="http://schemas.openxmlformats.org/drawingml/2006/main" wrap="square" lIns="0" tIns="0" rIns="0" bIns="0" anchor="t">
+            <a:noAutofit/>
+          </a:bodyPr>
+          <a:lstStyle xmlns:a="http://schemas.openxmlformats.org/drawingml/2006/main"/>
+          <a:p xmlns:a="http://schemas.openxmlformats.org/drawingml/2006/main">
+            <a:pPr>
+              <a:lnSpc>
+                <a:spcPct val="110000"/>
+              </a:lnSpc>
+              <a:buNone/>
+              <a:defRPr sz="1275" b="0">
+                <a:solidFill>
+                  <a:srgbClr val="58645D"/>
+                </a:solidFill>
+                <a:latin typeface="Helvetica Neue"/>
+                <a:ea typeface="Helvetica Neue"/>
+                <a:cs typeface="Helvetica Neue"/>
+              </a:defRPr>
+            </a:pPr>
+            <a:r>
+              <a:rPr sz="1275" b="0">
+                <a:solidFill>
+                  <a:srgbClr val="58645D"/>
+                </a:solidFill>
+                <a:latin typeface="Helvetica Neue"/>
+                <a:ea typeface="Helvetica Neue"/>
+                <a:cs typeface="Helvetica Neue"/>
+              </a:rPr>
+              <a:t>Original recommendation artifact.</a:t>
+            </a:r>
+          </a:p>
+          <a:p xmlns:a="http://schemas.openxmlformats.org/drawingml/2006/main">
+            <a:pPr>
+              <a:lnSpc>
+                <a:spcPct val="110000"/>
+              </a:lnSpc>
+              <a:buNone/>
+              <a:defRPr sz="1275" b="0">
+                <a:solidFill>
+                  <a:srgbClr val="58645D"/>
+                </a:solidFill>
+                <a:latin typeface="Helvetica Neue"/>
+                <a:ea typeface="Helvetica Neue"/>
+                <a:cs typeface="Helvetica Neue"/>
+              </a:defRPr>
+            </a:pPr>
+            <a:r>
+              <a:rPr sz="1275" b="0">
+                <a:solidFill>
+                  <a:srgbClr val="58645D"/>
+                </a:solidFill>
+                <a:latin typeface="Helvetica Neue"/>
+                <a:ea typeface="Helvetica Neue"/>
+                <a:cs typeface="Helvetica Neue"/>
+              </a:rPr>
+              <a:t>Exact shipped variant and usability impact unverified.</a:t>
+            </a:r>
+          </a:p>
+        </p:txBody>
+      </p:sp>
+      <p:sp>
+        <p:nvSpPr>
+          <p:cNvPr id="12" name="slide-number">
+            <a:extLst xmlns:a="http://schemas.openxmlformats.org/drawingml/2006/main">
+              <a:ext uri="{FF2B5EF4-FFF2-40B4-BE49-F238E27FC236}">
+                <a16:creationId xmlns:a16="http://schemas.microsoft.com/office/drawing/2014/main" id="{69B08671-FC17-458C-9508-0D91C8F0B629}"/>
               </a:ext>
             </a:extLst>
           </p:cNvPr>
@@ -6634,7 +6834,7 @@
     </p:spTree>
     <p:extLst>
       <p:ext uri="{BB962C8B-B14F-4D97-AF65-F5344CB8AC3E}">
-        <p14:creationId xmlns:p14="http://schemas.microsoft.com/office/powerpoint/2010/main" val="1533013922"/>
+        <p14:creationId xmlns:p14="http://schemas.microsoft.com/office/powerpoint/2010/main" val="1711103529"/>
       </p:ext>
     </p:extLst>
   </p:cSld>
@@ -6665,7 +6865,7 @@
           <p:cNvPr id="15" name="section-label">
             <a:extLst xmlns:a="http://schemas.openxmlformats.org/drawingml/2006/main">
               <a:ext uri="{FF2B5EF4-FFF2-40B4-BE49-F238E27FC236}">
-                <a16:creationId xmlns:a16="http://schemas.microsoft.com/office/drawing/2014/main" id="{C7F1F4F7-B0F9-4E5E-AD87-58964CDDB1F2}"/>
+                <a16:creationId xmlns:a16="http://schemas.microsoft.com/office/drawing/2014/main" id="{C5C2A202-391D-4236-8FD6-AC914BE4E970}"/>
               </a:ext>
             </a:extLst>
           </p:cNvPr>
@@ -6726,7 +6926,7 @@
           <p:cNvPr id="2" name="headline">
             <a:extLst xmlns:a="http://schemas.openxmlformats.org/drawingml/2006/main">
               <a:ext uri="{FF2B5EF4-FFF2-40B4-BE49-F238E27FC236}">
-                <a16:creationId xmlns:a16="http://schemas.microsoft.com/office/drawing/2014/main" id="{D31AFC9A-37C4-4F53-B0A1-1878F2D7D97C}"/>
+                <a16:creationId xmlns:a16="http://schemas.microsoft.com/office/drawing/2014/main" id="{F2F107EA-E123-4460-8BB6-D7513FED28AF}"/>
               </a:ext>
             </a:extLst>
           </p:cNvPr>
@@ -6787,7 +6987,7 @@
           <p:cNvPr id="3" name="handoff-intro">
             <a:extLst xmlns:a="http://schemas.openxmlformats.org/drawingml/2006/main">
               <a:ext uri="{FF2B5EF4-FFF2-40B4-BE49-F238E27FC236}">
-                <a16:creationId xmlns:a16="http://schemas.microsoft.com/office/drawing/2014/main" id="{BF689009-2515-4BDE-AD49-AE81A90279E7}"/>
+                <a16:creationId xmlns:a16="http://schemas.microsoft.com/office/drawing/2014/main" id="{7BC9D282-BEEF-479B-82D1-79463008F1EB}"/>
               </a:ext>
             </a:extLst>
           </p:cNvPr>
@@ -6848,7 +7048,7 @@
           <p:cNvPr id="4" name="step-date-0">
             <a:extLst xmlns:a="http://schemas.openxmlformats.org/drawingml/2006/main">
               <a:ext uri="{FF2B5EF4-FFF2-40B4-BE49-F238E27FC236}">
-                <a16:creationId xmlns:a16="http://schemas.microsoft.com/office/drawing/2014/main" id="{DFA8A55D-824A-4E6B-AE69-6779ED098F4D}"/>
+                <a16:creationId xmlns:a16="http://schemas.microsoft.com/office/drawing/2014/main" id="{5890D35B-D57B-4542-A007-EF045D1DE684}"/>
               </a:ext>
             </a:extLst>
           </p:cNvPr>
@@ -6909,7 +7109,7 @@
           <p:cNvPr id="5" name="step-title-0">
             <a:extLst xmlns:a="http://schemas.openxmlformats.org/drawingml/2006/main">
               <a:ext uri="{FF2B5EF4-FFF2-40B4-BE49-F238E27FC236}">
-                <a16:creationId xmlns:a16="http://schemas.microsoft.com/office/drawing/2014/main" id="{4FAB5912-2C4E-4462-B4C2-8F1B8A9925A6}"/>
+                <a16:creationId xmlns:a16="http://schemas.microsoft.com/office/drawing/2014/main" id="{D87B14BA-7309-4719-8FA0-F2F7C0D051D6}"/>
               </a:ext>
             </a:extLst>
           </p:cNvPr>
@@ -6970,7 +7170,7 @@
           <p:cNvPr id="6" name="step-detail-0">
             <a:extLst xmlns:a="http://schemas.openxmlformats.org/drawingml/2006/main">
               <a:ext uri="{FF2B5EF4-FFF2-40B4-BE49-F238E27FC236}">
-                <a16:creationId xmlns:a16="http://schemas.microsoft.com/office/drawing/2014/main" id="{A66BCE31-652E-4FD6-8E95-266C8EE96439}"/>
+                <a16:creationId xmlns:a16="http://schemas.microsoft.com/office/drawing/2014/main" id="{573C89F9-E758-4907-98EB-9A1D3C8C2479}"/>
               </a:ext>
             </a:extLst>
           </p:cNvPr>
@@ -7031,7 +7231,7 @@
           <p:cNvPr id="7" name="step-date-1">
             <a:extLst xmlns:a="http://schemas.openxmlformats.org/drawingml/2006/main">
               <a:ext uri="{FF2B5EF4-FFF2-40B4-BE49-F238E27FC236}">
-                <a16:creationId xmlns:a16="http://schemas.microsoft.com/office/drawing/2014/main" id="{968AF885-379B-4BE8-9082-6FE7D406CCAF}"/>
+                <a16:creationId xmlns:a16="http://schemas.microsoft.com/office/drawing/2014/main" id="{999A3CA7-881C-46C5-A22B-37925EC449BE}"/>
               </a:ext>
             </a:extLst>
           </p:cNvPr>
@@ -7092,7 +7292,7 @@
           <p:cNvPr id="8" name="step-title-1">
             <a:extLst xmlns:a="http://schemas.openxmlformats.org/drawingml/2006/main">
               <a:ext uri="{FF2B5EF4-FFF2-40B4-BE49-F238E27FC236}">
-                <a16:creationId xmlns:a16="http://schemas.microsoft.com/office/drawing/2014/main" id="{E66B78C2-BE40-4400-9AA0-F76B035F2696}"/>
+                <a16:creationId xmlns:a16="http://schemas.microsoft.com/office/drawing/2014/main" id="{00748DF4-EB34-4EB1-83CC-2030501CE400}"/>
               </a:ext>
             </a:extLst>
           </p:cNvPr>
@@ -7153,7 +7353,7 @@
           <p:cNvPr id="9" name="step-detail-1">
             <a:extLst xmlns:a="http://schemas.openxmlformats.org/drawingml/2006/main">
               <a:ext uri="{FF2B5EF4-FFF2-40B4-BE49-F238E27FC236}">
-                <a16:creationId xmlns:a16="http://schemas.microsoft.com/office/drawing/2014/main" id="{B05E3B60-B763-41DB-9A6B-5074A080ED20}"/>
+                <a16:creationId xmlns:a16="http://schemas.microsoft.com/office/drawing/2014/main" id="{98A8D5A6-512E-4CBF-AEB2-A6857AF66371}"/>
               </a:ext>
             </a:extLst>
           </p:cNvPr>
@@ -7214,7 +7414,7 @@
           <p:cNvPr id="10" name="step-date-2">
             <a:extLst xmlns:a="http://schemas.openxmlformats.org/drawingml/2006/main">
               <a:ext uri="{FF2B5EF4-FFF2-40B4-BE49-F238E27FC236}">
-                <a16:creationId xmlns:a16="http://schemas.microsoft.com/office/drawing/2014/main" id="{B086762A-6FAA-4A0C-ABCB-0370CFA1B7E6}"/>
+                <a16:creationId xmlns:a16="http://schemas.microsoft.com/office/drawing/2014/main" id="{3B0E5E85-87A7-49A5-998A-3069A24275D6}"/>
               </a:ext>
             </a:extLst>
           </p:cNvPr>
@@ -7275,7 +7475,7 @@
           <p:cNvPr id="11" name="step-title-2">
             <a:extLst xmlns:a="http://schemas.openxmlformats.org/drawingml/2006/main">
               <a:ext uri="{FF2B5EF4-FFF2-40B4-BE49-F238E27FC236}">
-                <a16:creationId xmlns:a16="http://schemas.microsoft.com/office/drawing/2014/main" id="{1CD3190B-A04B-456C-9BFB-1A13DBDBA052}"/>
+                <a16:creationId xmlns:a16="http://schemas.microsoft.com/office/drawing/2014/main" id="{5D7577F4-8E89-41A7-BBBA-1B9212472F51}"/>
               </a:ext>
             </a:extLst>
           </p:cNvPr>
@@ -7336,7 +7536,7 @@
           <p:cNvPr id="12" name="step-detail-2">
             <a:extLst xmlns:a="http://schemas.openxmlformats.org/drawingml/2006/main">
               <a:ext uri="{FF2B5EF4-FFF2-40B4-BE49-F238E27FC236}">
-                <a16:creationId xmlns:a16="http://schemas.microsoft.com/office/drawing/2014/main" id="{6BC5D774-0E1D-4DD1-B578-A37A3CC83C6B}"/>
+                <a16:creationId xmlns:a16="http://schemas.microsoft.com/office/drawing/2014/main" id="{C9207A02-C4EC-4BDF-863C-923CA43FF802}"/>
               </a:ext>
             </a:extLst>
           </p:cNvPr>
@@ -7397,7 +7597,7 @@
           <p:cNvPr id="13" name="credit">
             <a:extLst xmlns:a="http://schemas.openxmlformats.org/drawingml/2006/main">
               <a:ext uri="{FF2B5EF4-FFF2-40B4-BE49-F238E27FC236}">
-                <a16:creationId xmlns:a16="http://schemas.microsoft.com/office/drawing/2014/main" id="{582B1B26-3EAA-4771-92D5-47B21FD75F2A}"/>
+                <a16:creationId xmlns:a16="http://schemas.microsoft.com/office/drawing/2014/main" id="{F76D0D7A-C138-40E6-9539-95036CF99CBA}"/>
               </a:ext>
             </a:extLst>
           </p:cNvPr>
@@ -7458,7 +7658,7 @@
           <p:cNvPr id="14" name="slide-number">
             <a:extLst xmlns:a="http://schemas.openxmlformats.org/drawingml/2006/main">
               <a:ext uri="{FF2B5EF4-FFF2-40B4-BE49-F238E27FC236}">
-                <a16:creationId xmlns:a16="http://schemas.microsoft.com/office/drawing/2014/main" id="{89959724-F263-46AA-90EF-9033A078CE07}"/>
+                <a16:creationId xmlns:a16="http://schemas.microsoft.com/office/drawing/2014/main" id="{3FA2CB19-CAE5-4499-A8C9-6B7070025EFA}"/>
               </a:ext>
             </a:extLst>
           </p:cNvPr>
@@ -7517,7 +7717,7 @@
     </p:spTree>
     <p:extLst>
       <p:ext uri="{BB962C8B-B14F-4D97-AF65-F5344CB8AC3E}">
-        <p14:creationId xmlns:p14="http://schemas.microsoft.com/office/powerpoint/2010/main" val="908395878"/>
+        <p14:creationId xmlns:p14="http://schemas.microsoft.com/office/powerpoint/2010/main" val="1558185215"/>
       </p:ext>
     </p:extLst>
   </p:cSld>

--- a/downloads/research/kyle-hobson-research-deck.pptx
+++ b/downloads/research/kyle-hobson-research-deck.pptx
@@ -662,7 +662,7 @@
           <a:lstStyle xmlns:a="http://schemas.openxmlformats.org/drawingml/2006/main"/>
           <a:p xmlns:a="http://schemas.openxmlformats.org/drawingml/2006/main">
             <a:r>
-              <a:t>Case: Oak + Qasim audience survey, March 2025. Kyle’s reviewed portfolio identifies his role as leading survey design, launch and analysis. Original source: Survey #1 Phase 2 — Findings Report: Understanding Audience Pain Points &amp; Value-Aligned Actions, page 4. The report records 1,459 complete submissions as of March 14, 2025 while the survey remained live. This is a voluntary creator/advocacy audience sample, with predominantly older, female and highly educated respondents. Self-reported needs and preferences do not establish future behavior.</a:t>
+              <a:t>Case: Oak + Qasim audience survey, March 2025. Kyle’s reviewed portfolio identifies his role as leading survey design, launch and analysis. Original source: Survey #1 Phase 2: Findings Report: Understanding Audience Pain Points &amp; Value-Aligned Actions, page 4. The report records 1,459 complete submissions as of March 14, 2025 while the survey remained live. This is a voluntary creator/advocacy audience sample, with predominantly older, female and highly educated respondents. Self-reported needs and preferences do not establish future behavior.</a:t>
             </a:r>
           </a:p>
         </p:txBody>
